--- a/lecture-slides_upload/lecture/06_Statistical Methods_Making Predictions.pptx
+++ b/lecture-slides_upload/lecture/06_Statistical Methods_Making Predictions.pptx
@@ -5,48 +5,49 @@
     <p:sldMasterId id="2147483648" r:id="rId1"/>
   </p:sldMasterIdLst>
   <p:notesMasterIdLst>
-    <p:notesMasterId r:id="rId41"/>
+    <p:notesMasterId r:id="rId42"/>
   </p:notesMasterIdLst>
   <p:sldIdLst>
     <p:sldId id="257" r:id="rId2"/>
     <p:sldId id="258" r:id="rId3"/>
-    <p:sldId id="354" r:id="rId4"/>
-    <p:sldId id="355" r:id="rId5"/>
-    <p:sldId id="259" r:id="rId6"/>
-    <p:sldId id="260" r:id="rId7"/>
-    <p:sldId id="261" r:id="rId8"/>
-    <p:sldId id="270" r:id="rId9"/>
-    <p:sldId id="281" r:id="rId10"/>
-    <p:sldId id="282" r:id="rId11"/>
-    <p:sldId id="283" r:id="rId12"/>
-    <p:sldId id="262" r:id="rId13"/>
-    <p:sldId id="263" r:id="rId14"/>
-    <p:sldId id="264" r:id="rId15"/>
-    <p:sldId id="265" r:id="rId16"/>
-    <p:sldId id="302" r:id="rId17"/>
-    <p:sldId id="266" r:id="rId18"/>
-    <p:sldId id="267" r:id="rId19"/>
-    <p:sldId id="300" r:id="rId20"/>
-    <p:sldId id="268" r:id="rId21"/>
-    <p:sldId id="323" r:id="rId22"/>
-    <p:sldId id="287" r:id="rId23"/>
-    <p:sldId id="288" r:id="rId24"/>
-    <p:sldId id="289" r:id="rId25"/>
-    <p:sldId id="290" r:id="rId26"/>
-    <p:sldId id="291" r:id="rId27"/>
-    <p:sldId id="294" r:id="rId28"/>
-    <p:sldId id="324" r:id="rId29"/>
-    <p:sldId id="325" r:id="rId30"/>
-    <p:sldId id="313" r:id="rId31"/>
-    <p:sldId id="315" r:id="rId32"/>
-    <p:sldId id="357" r:id="rId33"/>
-    <p:sldId id="356" r:id="rId34"/>
-    <p:sldId id="316" r:id="rId35"/>
-    <p:sldId id="304" r:id="rId36"/>
-    <p:sldId id="333" r:id="rId37"/>
-    <p:sldId id="358" r:id="rId38"/>
-    <p:sldId id="353" r:id="rId39"/>
-    <p:sldId id="359" r:id="rId40"/>
+    <p:sldId id="360" r:id="rId4"/>
+    <p:sldId id="354" r:id="rId5"/>
+    <p:sldId id="355" r:id="rId6"/>
+    <p:sldId id="259" r:id="rId7"/>
+    <p:sldId id="260" r:id="rId8"/>
+    <p:sldId id="261" r:id="rId9"/>
+    <p:sldId id="270" r:id="rId10"/>
+    <p:sldId id="281" r:id="rId11"/>
+    <p:sldId id="282" r:id="rId12"/>
+    <p:sldId id="283" r:id="rId13"/>
+    <p:sldId id="262" r:id="rId14"/>
+    <p:sldId id="263" r:id="rId15"/>
+    <p:sldId id="264" r:id="rId16"/>
+    <p:sldId id="265" r:id="rId17"/>
+    <p:sldId id="302" r:id="rId18"/>
+    <p:sldId id="266" r:id="rId19"/>
+    <p:sldId id="267" r:id="rId20"/>
+    <p:sldId id="300" r:id="rId21"/>
+    <p:sldId id="268" r:id="rId22"/>
+    <p:sldId id="323" r:id="rId23"/>
+    <p:sldId id="287" r:id="rId24"/>
+    <p:sldId id="288" r:id="rId25"/>
+    <p:sldId id="289" r:id="rId26"/>
+    <p:sldId id="290" r:id="rId27"/>
+    <p:sldId id="291" r:id="rId28"/>
+    <p:sldId id="294" r:id="rId29"/>
+    <p:sldId id="324" r:id="rId30"/>
+    <p:sldId id="325" r:id="rId31"/>
+    <p:sldId id="313" r:id="rId32"/>
+    <p:sldId id="315" r:id="rId33"/>
+    <p:sldId id="357" r:id="rId34"/>
+    <p:sldId id="356" r:id="rId35"/>
+    <p:sldId id="316" r:id="rId36"/>
+    <p:sldId id="304" r:id="rId37"/>
+    <p:sldId id="333" r:id="rId38"/>
+    <p:sldId id="358" r:id="rId39"/>
+    <p:sldId id="353" r:id="rId40"/>
+    <p:sldId id="359" r:id="rId41"/>
   </p:sldIdLst>
   <p:sldSz cx="12192000" cy="6858000"/>
   <p:notesSz cx="6858000" cy="9144000"/>
@@ -247,7 +248,7 @@
           <a:p>
             <a:fld id="{6A4B1ABF-BAF2-0E4B-88A8-8F2BBF0074AC}" type="datetimeFigureOut">
               <a:rPr lang="en-US" smtClean="0"/>
-              <a:t>3/27/24</a:t>
+              <a:t>10/6/25</a:t>
             </a:fld>
             <a:endParaRPr lang="en-US"/>
           </a:p>
@@ -635,7 +636,7 @@
             <a:fld id="{00D60E13-A65F-4289-9112-7F20628745AA}" type="slidenum">
               <a:rPr lang="en-US"/>
               <a:pPr/>
-              <a:t>23</a:t>
+              <a:t>24</a:t>
             </a:fld>
             <a:endParaRPr lang="en-US"/>
           </a:p>
@@ -728,7 +729,7 @@
             <a:fld id="{C78221DE-63D0-41F5-80E2-0CFCB9292A0C}" type="slidenum">
               <a:rPr lang="en-US"/>
               <a:pPr/>
-              <a:t>24</a:t>
+              <a:t>25</a:t>
             </a:fld>
             <a:endParaRPr lang="en-US"/>
           </a:p>
@@ -821,7 +822,7 @@
             <a:fld id="{F360933E-C66D-44B2-8FEB-A546D2810AAC}" type="slidenum">
               <a:rPr lang="en-US"/>
               <a:pPr/>
-              <a:t>25</a:t>
+              <a:t>26</a:t>
             </a:fld>
             <a:endParaRPr lang="en-US"/>
           </a:p>
@@ -914,7 +915,7 @@
             <a:fld id="{FCE11E38-C466-433F-A3D2-7FC1C8A666A1}" type="slidenum">
               <a:rPr lang="en-US"/>
               <a:pPr/>
-              <a:t>26</a:t>
+              <a:t>27</a:t>
             </a:fld>
             <a:endParaRPr lang="en-US"/>
           </a:p>
@@ -1007,7 +1008,7 @@
             <a:fld id="{0969B33C-A7D5-4364-B782-F1205A3DDCA3}" type="slidenum">
               <a:rPr lang="en-US"/>
               <a:pPr/>
-              <a:t>27</a:t>
+              <a:t>28</a:t>
             </a:fld>
             <a:endParaRPr lang="en-US"/>
           </a:p>
@@ -1131,7 +1132,7 @@
           <a:p>
             <a:fld id="{66610047-E131-0346-ABBC-77645D001C55}" type="slidenum">
               <a:rPr lang="en-US" smtClean="0"/>
-              <a:t>28</a:t>
+              <a:t>29</a:t>
             </a:fld>
             <a:endParaRPr lang="en-US"/>
           </a:p>
@@ -1281,7 +1282,7 @@
           <a:p>
             <a:fld id="{66610047-E131-0346-ABBC-77645D001C55}" type="slidenum">
               <a:rPr lang="en-US" smtClean="0"/>
-              <a:t>29</a:t>
+              <a:t>30</a:t>
             </a:fld>
             <a:endParaRPr lang="en-US"/>
           </a:p>
@@ -1510,7 +1511,7 @@
           <a:p>
             <a:fld id="{66610047-E131-0346-ABBC-77645D001C55}" type="slidenum">
               <a:rPr lang="en-US" smtClean="0"/>
-              <a:t>31</a:t>
+              <a:t>32</a:t>
             </a:fld>
             <a:endParaRPr lang="en-US"/>
           </a:p>
@@ -1695,7 +1696,7 @@
           <a:p>
             <a:fld id="{66610047-E131-0346-ABBC-77645D001C55}" type="slidenum">
               <a:rPr lang="en-US" smtClean="0"/>
-              <a:t>33</a:t>
+              <a:t>34</a:t>
             </a:fld>
             <a:endParaRPr lang="en-US"/>
           </a:p>
@@ -1947,7 +1948,7 @@
           <a:p>
             <a:fld id="{66610047-E131-0346-ABBC-77645D001C55}" type="slidenum">
               <a:rPr lang="en-US" smtClean="0"/>
-              <a:t>34</a:t>
+              <a:t>35</a:t>
             </a:fld>
             <a:endParaRPr lang="en-US"/>
           </a:p>
@@ -2003,7 +2004,7 @@
             <a:fld id="{7593C708-9895-461D-887B-1EB92B8E4AF2}" type="slidenum">
               <a:rPr lang="en-US"/>
               <a:pPr/>
-              <a:t>9</a:t>
+              <a:t>10</a:t>
             </a:fld>
             <a:endParaRPr lang="en-US"/>
           </a:p>
@@ -2237,7 +2238,7 @@
             <a:fld id="{7411DFC6-FE59-4F7A-B185-C1903002E74D}" type="slidenum">
               <a:rPr lang="en-US"/>
               <a:pPr/>
-              <a:t>10</a:t>
+              <a:t>11</a:t>
             </a:fld>
             <a:endParaRPr lang="en-US"/>
           </a:p>
@@ -2330,7 +2331,7 @@
             <a:fld id="{3BFBE533-39A1-482B-8800-5D9AAE0138F2}" type="slidenum">
               <a:rPr lang="en-US"/>
               <a:pPr/>
-              <a:t>11</a:t>
+              <a:t>12</a:t>
             </a:fld>
             <a:endParaRPr lang="en-US"/>
           </a:p>
@@ -2506,7 +2507,7 @@
           <a:p>
             <a:fld id="{66610047-E131-0346-ABBC-77645D001C55}" type="slidenum">
               <a:rPr lang="en-US" smtClean="0"/>
-              <a:t>14</a:t>
+              <a:t>15</a:t>
             </a:fld>
             <a:endParaRPr lang="en-US"/>
           </a:p>
@@ -2562,7 +2563,7 @@
             <a:fld id="{FFC189E9-4F04-4F7E-98CB-41DB8E137580}" type="slidenum">
               <a:rPr lang="en-US"/>
               <a:pPr/>
-              <a:t>16</a:t>
+              <a:t>17</a:t>
             </a:fld>
             <a:endParaRPr lang="en-US"/>
           </a:p>
@@ -2688,7 +2689,7 @@
           <a:p>
             <a:fld id="{66610047-E131-0346-ABBC-77645D001C55}" type="slidenum">
               <a:rPr lang="en-US" smtClean="0"/>
-              <a:t>17</a:t>
+              <a:t>18</a:t>
             </a:fld>
             <a:endParaRPr lang="en-US"/>
           </a:p>
@@ -2744,7 +2745,7 @@
             <a:fld id="{8E01E5BB-67FA-40DC-851F-35280E2C5364}" type="slidenum">
               <a:rPr lang="en-US"/>
               <a:pPr/>
-              <a:t>19</a:t>
+              <a:t>20</a:t>
             </a:fld>
             <a:endParaRPr lang="en-US"/>
           </a:p>
@@ -2900,7 +2901,7 @@
             <a:fld id="{F22746A5-5013-4FEC-AC8F-FDBD31241FA4}" type="slidenum">
               <a:rPr lang="en-US"/>
               <a:pPr/>
-              <a:t>22</a:t>
+              <a:t>23</a:t>
             </a:fld>
             <a:endParaRPr lang="en-US"/>
           </a:p>
@@ -3103,7 +3104,7 @@
           <a:p>
             <a:fld id="{BA763BF8-AC66-E249-9CE8-8353EEB16B82}" type="datetimeFigureOut">
               <a:rPr lang="en-US" smtClean="0"/>
-              <a:t>3/27/24</a:t>
+              <a:t>10/6/25</a:t>
             </a:fld>
             <a:endParaRPr lang="en-US"/>
           </a:p>
@@ -3305,7 +3306,7 @@
           <a:p>
             <a:fld id="{BA763BF8-AC66-E249-9CE8-8353EEB16B82}" type="datetimeFigureOut">
               <a:rPr lang="en-US" smtClean="0"/>
-              <a:t>3/27/24</a:t>
+              <a:t>10/6/25</a:t>
             </a:fld>
             <a:endParaRPr lang="en-US"/>
           </a:p>
@@ -3513,7 +3514,7 @@
           <a:p>
             <a:fld id="{BA763BF8-AC66-E249-9CE8-8353EEB16B82}" type="datetimeFigureOut">
               <a:rPr lang="en-US" smtClean="0"/>
-              <a:t>3/27/24</a:t>
+              <a:t>10/6/25</a:t>
             </a:fld>
             <a:endParaRPr lang="en-US"/>
           </a:p>
@@ -3928,7 +3929,7 @@
           <a:p>
             <a:fld id="{BA763BF8-AC66-E249-9CE8-8353EEB16B82}" type="datetimeFigureOut">
               <a:rPr lang="en-US" smtClean="0"/>
-              <a:t>3/27/24</a:t>
+              <a:t>10/6/25</a:t>
             </a:fld>
             <a:endParaRPr lang="en-US"/>
           </a:p>
@@ -4203,7 +4204,7 @@
           <a:p>
             <a:fld id="{BA763BF8-AC66-E249-9CE8-8353EEB16B82}" type="datetimeFigureOut">
               <a:rPr lang="en-US" smtClean="0"/>
-              <a:t>3/27/24</a:t>
+              <a:t>10/6/25</a:t>
             </a:fld>
             <a:endParaRPr lang="en-US"/>
           </a:p>
@@ -4472,7 +4473,7 @@
           <a:p>
             <a:fld id="{BA763BF8-AC66-E249-9CE8-8353EEB16B82}" type="datetimeFigureOut">
               <a:rPr lang="en-US" smtClean="0"/>
-              <a:t>3/27/24</a:t>
+              <a:t>10/6/25</a:t>
             </a:fld>
             <a:endParaRPr lang="en-US"/>
           </a:p>
@@ -4888,7 +4889,7 @@
           <a:p>
             <a:fld id="{BA763BF8-AC66-E249-9CE8-8353EEB16B82}" type="datetimeFigureOut">
               <a:rPr lang="en-US" smtClean="0"/>
-              <a:t>3/27/24</a:t>
+              <a:t>10/6/25</a:t>
             </a:fld>
             <a:endParaRPr lang="en-US"/>
           </a:p>
@@ -5033,7 +5034,7 @@
           <a:p>
             <a:fld id="{BA763BF8-AC66-E249-9CE8-8353EEB16B82}" type="datetimeFigureOut">
               <a:rPr lang="en-US" smtClean="0"/>
-              <a:t>3/27/24</a:t>
+              <a:t>10/6/25</a:t>
             </a:fld>
             <a:endParaRPr lang="en-US"/>
           </a:p>
@@ -5146,7 +5147,7 @@
           <a:p>
             <a:fld id="{BA763BF8-AC66-E249-9CE8-8353EEB16B82}" type="datetimeFigureOut">
               <a:rPr lang="en-US" smtClean="0"/>
-              <a:t>3/27/24</a:t>
+              <a:t>10/6/25</a:t>
             </a:fld>
             <a:endParaRPr lang="en-US"/>
           </a:p>
@@ -5457,7 +5458,7 @@
           <a:p>
             <a:fld id="{BA763BF8-AC66-E249-9CE8-8353EEB16B82}" type="datetimeFigureOut">
               <a:rPr lang="en-US" smtClean="0"/>
-              <a:t>3/27/24</a:t>
+              <a:t>10/6/25</a:t>
             </a:fld>
             <a:endParaRPr lang="en-US"/>
           </a:p>
@@ -5745,7 +5746,7 @@
           <a:p>
             <a:fld id="{BA763BF8-AC66-E249-9CE8-8353EEB16B82}" type="datetimeFigureOut">
               <a:rPr lang="en-US" smtClean="0"/>
-              <a:t>3/27/24</a:t>
+              <a:t>10/6/25</a:t>
             </a:fld>
             <a:endParaRPr lang="en-US"/>
           </a:p>
@@ -5989,7 +5990,7 @@
             <a:fld id="{BA763BF8-AC66-E249-9CE8-8353EEB16B82}" type="datetimeFigureOut">
               <a:rPr lang="en-US" smtClean="0"/>
               <a:pPr/>
-              <a:t>3/27/24</a:t>
+              <a:t>10/6/25</a:t>
             </a:fld>
             <a:endParaRPr lang="en-US"/>
           </a:p>
@@ -6464,19 +6465,14 @@
           <a:lstStyle/>
           <a:p>
             <a:r>
-              <a:rPr lang="en-GB"/>
-              <a:t>Jamil </a:t>
-            </a:r>
-            <a:r>
-              <a:rPr lang="en-GB" dirty="0" err="1"/>
-              <a:t>Bhanji</a:t>
-            </a:r>
-            <a:endParaRPr lang="en-GB" dirty="0"/>
-          </a:p>
-          <a:p>
-            <a:r>
               <a:rPr lang="en-GB" dirty="0"/>
-              <a:t>with a little help from Andy Field</a:t>
+              <a:t>Jamil Bhanji</a:t>
+            </a:r>
+          </a:p>
+          <a:p>
+            <a:r>
+              <a:rPr lang="en-GB" dirty="0"/>
+              <a:t>with help from Vanessa Lobue and Andy Field</a:t>
             </a:r>
           </a:p>
         </p:txBody>
@@ -6495,6 +6491,447 @@
 </file>
 
 <file path=ppt/slides/slide10.xml><?xml version="1.0" encoding="utf-8"?>
+<p:sld xmlns:a="http://schemas.openxmlformats.org/drawingml/2006/main" xmlns:r="http://schemas.openxmlformats.org/officeDocument/2006/relationships" xmlns:p="http://schemas.openxmlformats.org/presentationml/2006/main" showMasterPhAnim="0">
+  <p:cSld>
+    <p:spTree>
+      <p:nvGrpSpPr>
+        <p:cNvPr id="1" name=""/>
+        <p:cNvGrpSpPr/>
+        <p:nvPr/>
+      </p:nvGrpSpPr>
+      <p:grpSpPr>
+        <a:xfrm>
+          <a:off x="0" y="0"/>
+          <a:ext cx="0" cy="0"/>
+          <a:chOff x="0" y="0"/>
+          <a:chExt cx="0" cy="0"/>
+        </a:xfrm>
+      </p:grpSpPr>
+      <p:sp>
+        <p:nvSpPr>
+          <p:cNvPr id="217090" name="Rectangle 2"/>
+          <p:cNvSpPr>
+            <a:spLocks noGrp="1" noChangeArrowheads="1"/>
+          </p:cNvSpPr>
+          <p:nvPr>
+            <p:ph type="title"/>
+          </p:nvPr>
+        </p:nvSpPr>
+        <p:spPr>
+          <a:xfrm>
+            <a:off x="551543" y="228600"/>
+            <a:ext cx="10972800" cy="1143000"/>
+          </a:xfrm>
+        </p:spPr>
+        <p:txBody>
+          <a:bodyPr>
+            <a:normAutofit/>
+          </a:bodyPr>
+          <a:lstStyle/>
+          <a:p>
+            <a:r>
+              <a:rPr lang="en-GB" dirty="0"/>
+              <a:t>The Model as an Equation</a:t>
+            </a:r>
+          </a:p>
+        </p:txBody>
+      </p:sp>
+      <p:sp>
+        <p:nvSpPr>
+          <p:cNvPr id="217091" name="Rectangle 3"/>
+          <p:cNvSpPr>
+            <a:spLocks noGrp="1" noChangeArrowheads="1"/>
+          </p:cNvSpPr>
+          <p:nvPr>
+            <p:ph type="body" idx="1"/>
+          </p:nvPr>
+        </p:nvSpPr>
+        <p:spPr>
+          <a:xfrm>
+            <a:off x="961570" y="1601108"/>
+            <a:ext cx="9909629" cy="2840264"/>
+          </a:xfrm>
+        </p:spPr>
+        <p:txBody>
+          <a:bodyPr/>
+          <a:lstStyle/>
+          <a:p>
+            <a:pPr>
+              <a:lnSpc>
+                <a:spcPct val="90000"/>
+              </a:lnSpc>
+            </a:pPr>
+            <a:r>
+              <a:rPr lang="en-GB" sz="4000" dirty="0"/>
+              <a:t>With several predictors the model is described using a variation of the equation of a straight line.</a:t>
+            </a:r>
+          </a:p>
+        </p:txBody>
+      </p:sp>
+      <mc:AlternateContent xmlns:mc="http://schemas.openxmlformats.org/markup-compatibility/2006" xmlns:a14="http://schemas.microsoft.com/office/drawing/2010/main">
+        <mc:Choice Requires="a14">
+          <p:sp>
+            <p:nvSpPr>
+              <p:cNvPr id="3" name="Rectangle 2"/>
+              <p:cNvSpPr/>
+              <p:nvPr/>
+            </p:nvSpPr>
+            <p:spPr>
+              <a:xfrm>
+                <a:off x="1753401" y="4148984"/>
+                <a:ext cx="7849841" cy="584775"/>
+              </a:xfrm>
+              <a:prstGeom prst="rect">
+                <a:avLst/>
+              </a:prstGeom>
+            </p:spPr>
+            <p:txBody>
+              <a:bodyPr wrap="none">
+                <a:spAutoFit/>
+              </a:bodyPr>
+              <a:lstStyle/>
+              <a:p>
+                <a:pPr/>
+                <a14:m>
+                  <m:oMathPara xmlns:m="http://schemas.openxmlformats.org/officeDocument/2006/math">
+                    <m:oMathParaPr>
+                      <m:jc m:val="centerGroup"/>
+                    </m:oMathParaPr>
+                    <m:oMath xmlns:m="http://schemas.openxmlformats.org/officeDocument/2006/math">
+                      <m:sSub>
+                        <m:sSubPr>
+                          <m:ctrlPr>
+                            <a:rPr lang="en-GB" sz="3200" i="1">
+                              <a:latin typeface="Cambria Math" panose="02040503050406030204" pitchFamily="18" charset="0"/>
+                            </a:rPr>
+                          </m:ctrlPr>
+                        </m:sSubPr>
+                        <m:e>
+                          <m:r>
+                            <a:rPr lang="en-GB" sz="3200" i="1">
+                              <a:latin typeface="Cambria Math" charset="0"/>
+                            </a:rPr>
+                            <m:t>𝑌</m:t>
+                          </m:r>
+                        </m:e>
+                        <m:sub>
+                          <m:r>
+                            <a:rPr lang="en-GB" sz="3200" i="1">
+                              <a:latin typeface="Cambria Math" charset="0"/>
+                            </a:rPr>
+                            <m:t>𝑖</m:t>
+                          </m:r>
+                        </m:sub>
+                      </m:sSub>
+                      <m:r>
+                        <a:rPr lang="en-GB" sz="3200">
+                          <a:latin typeface="Cambria Math" charset="0"/>
+                        </a:rPr>
+                        <m:t>=</m:t>
+                      </m:r>
+                      <m:d>
+                        <m:dPr>
+                          <m:ctrlPr>
+                            <a:rPr lang="en-GB" sz="3200" i="1">
+                              <a:latin typeface="Cambria Math" panose="02040503050406030204" pitchFamily="18" charset="0"/>
+                            </a:rPr>
+                          </m:ctrlPr>
+                        </m:dPr>
+                        <m:e>
+                          <m:sSub>
+                            <m:sSubPr>
+                              <m:ctrlPr>
+                                <a:rPr lang="en-GB" sz="3200" i="1">
+                                  <a:latin typeface="Cambria Math" panose="02040503050406030204" pitchFamily="18" charset="0"/>
+                                </a:rPr>
+                              </m:ctrlPr>
+                            </m:sSubPr>
+                            <m:e>
+                              <m:r>
+                                <a:rPr lang="en-GB" sz="3200" i="1">
+                                  <a:latin typeface="Cambria Math" charset="0"/>
+                                </a:rPr>
+                                <m:t>𝑏</m:t>
+                              </m:r>
+                            </m:e>
+                            <m:sub>
+                              <m:r>
+                                <a:rPr lang="en-GB" sz="3200">
+                                  <a:latin typeface="Cambria Math" charset="0"/>
+                                </a:rPr>
+                                <m:t>0</m:t>
+                              </m:r>
+                            </m:sub>
+                          </m:sSub>
+                          <m:r>
+                            <a:rPr lang="en-GB" sz="3200">
+                              <a:latin typeface="Cambria Math" charset="0"/>
+                            </a:rPr>
+                            <m:t>+</m:t>
+                          </m:r>
+                          <m:sSub>
+                            <m:sSubPr>
+                              <m:ctrlPr>
+                                <a:rPr lang="en-GB" sz="3200" i="1">
+                                  <a:latin typeface="Cambria Math" panose="02040503050406030204" pitchFamily="18" charset="0"/>
+                                </a:rPr>
+                              </m:ctrlPr>
+                            </m:sSubPr>
+                            <m:e>
+                              <m:r>
+                                <a:rPr lang="en-GB" sz="3200" i="1">
+                                  <a:latin typeface="Cambria Math" charset="0"/>
+                                </a:rPr>
+                                <m:t>𝑏</m:t>
+                              </m:r>
+                            </m:e>
+                            <m:sub>
+                              <m:r>
+                                <a:rPr lang="en-GB" sz="3200">
+                                  <a:latin typeface="Cambria Math" charset="0"/>
+                                </a:rPr>
+                                <m:t>1</m:t>
+                              </m:r>
+                            </m:sub>
+                          </m:sSub>
+                          <m:sSub>
+                            <m:sSubPr>
+                              <m:ctrlPr>
+                                <a:rPr lang="en-GB" sz="3200" i="1">
+                                  <a:latin typeface="Cambria Math" panose="02040503050406030204" pitchFamily="18" charset="0"/>
+                                </a:rPr>
+                              </m:ctrlPr>
+                            </m:sSubPr>
+                            <m:e>
+                              <m:r>
+                                <a:rPr lang="en-GB" sz="3200" i="1">
+                                  <a:latin typeface="Cambria Math" charset="0"/>
+                                </a:rPr>
+                                <m:t>𝑋</m:t>
+                              </m:r>
+                            </m:e>
+                            <m:sub>
+                              <m:r>
+                                <a:rPr lang="en-GB" sz="3200">
+                                  <a:latin typeface="Cambria Math" charset="0"/>
+                                </a:rPr>
+                                <m:t>1</m:t>
+                              </m:r>
+                              <m:r>
+                                <a:rPr lang="en-GB" sz="3200" i="1">
+                                  <a:latin typeface="Cambria Math" charset="0"/>
+                                </a:rPr>
+                                <m:t>𝑖</m:t>
+                              </m:r>
+                            </m:sub>
+                          </m:sSub>
+                          <m:r>
+                            <a:rPr lang="en-GB" sz="3200">
+                              <a:latin typeface="Cambria Math" charset="0"/>
+                            </a:rPr>
+                            <m:t>+</m:t>
+                          </m:r>
+                          <m:sSub>
+                            <m:sSubPr>
+                              <m:ctrlPr>
+                                <a:rPr lang="en-GB" sz="3200" i="1">
+                                  <a:latin typeface="Cambria Math" panose="02040503050406030204" pitchFamily="18" charset="0"/>
+                                </a:rPr>
+                              </m:ctrlPr>
+                            </m:sSubPr>
+                            <m:e>
+                              <m:r>
+                                <a:rPr lang="en-GB" sz="3200" i="1">
+                                  <a:latin typeface="Cambria Math" charset="0"/>
+                                </a:rPr>
+                                <m:t>𝑏</m:t>
+                              </m:r>
+                            </m:e>
+                            <m:sub>
+                              <m:r>
+                                <a:rPr lang="en-GB" sz="3200">
+                                  <a:latin typeface="Cambria Math" charset="0"/>
+                                </a:rPr>
+                                <m:t>2</m:t>
+                              </m:r>
+                            </m:sub>
+                          </m:sSub>
+                          <m:sSub>
+                            <m:sSubPr>
+                              <m:ctrlPr>
+                                <a:rPr lang="en-GB" sz="3200" i="1">
+                                  <a:latin typeface="Cambria Math" panose="02040503050406030204" pitchFamily="18" charset="0"/>
+                                </a:rPr>
+                              </m:ctrlPr>
+                            </m:sSubPr>
+                            <m:e>
+                              <m:r>
+                                <a:rPr lang="en-GB" sz="3200" i="1">
+                                  <a:latin typeface="Cambria Math" charset="0"/>
+                                </a:rPr>
+                                <m:t>𝑋</m:t>
+                              </m:r>
+                            </m:e>
+                            <m:sub>
+                              <m:r>
+                                <a:rPr lang="en-GB" sz="3200">
+                                  <a:latin typeface="Cambria Math" charset="0"/>
+                                </a:rPr>
+                                <m:t>2</m:t>
+                              </m:r>
+                              <m:r>
+                                <a:rPr lang="en-GB" sz="3200" i="1">
+                                  <a:latin typeface="Cambria Math" charset="0"/>
+                                </a:rPr>
+                                <m:t>𝑖</m:t>
+                              </m:r>
+                            </m:sub>
+                          </m:sSub>
+                          <m:r>
+                            <a:rPr lang="en-GB" sz="3200">
+                              <a:latin typeface="Cambria Math" charset="0"/>
+                            </a:rPr>
+                            <m:t>+⋯+</m:t>
+                          </m:r>
+                          <m:sSub>
+                            <m:sSubPr>
+                              <m:ctrlPr>
+                                <a:rPr lang="en-GB" sz="3200" i="1">
+                                  <a:latin typeface="Cambria Math" panose="02040503050406030204" pitchFamily="18" charset="0"/>
+                                </a:rPr>
+                              </m:ctrlPr>
+                            </m:sSubPr>
+                            <m:e>
+                              <m:r>
+                                <a:rPr lang="en-GB" sz="3200" i="1">
+                                  <a:latin typeface="Cambria Math" charset="0"/>
+                                </a:rPr>
+                                <m:t>𝑏</m:t>
+                              </m:r>
+                            </m:e>
+                            <m:sub>
+                              <m:r>
+                                <a:rPr lang="en-GB" sz="3200" i="1">
+                                  <a:latin typeface="Cambria Math" charset="0"/>
+                                </a:rPr>
+                                <m:t>𝑛</m:t>
+                              </m:r>
+                            </m:sub>
+                          </m:sSub>
+                          <m:sSub>
+                            <m:sSubPr>
+                              <m:ctrlPr>
+                                <a:rPr lang="en-GB" sz="3200" i="1">
+                                  <a:latin typeface="Cambria Math" panose="02040503050406030204" pitchFamily="18" charset="0"/>
+                                </a:rPr>
+                              </m:ctrlPr>
+                            </m:sSubPr>
+                            <m:e>
+                              <m:r>
+                                <a:rPr lang="en-GB" sz="3200" i="1">
+                                  <a:latin typeface="Cambria Math" charset="0"/>
+                                </a:rPr>
+                                <m:t>𝑋</m:t>
+                              </m:r>
+                            </m:e>
+                            <m:sub>
+                              <m:r>
+                                <a:rPr lang="en-GB" sz="3200" i="1">
+                                  <a:latin typeface="Cambria Math" charset="0"/>
+                                </a:rPr>
+                                <m:t>𝑛𝑖</m:t>
+                              </m:r>
+                            </m:sub>
+                          </m:sSub>
+                        </m:e>
+                      </m:d>
+                      <m:r>
+                        <a:rPr lang="en-GB" sz="3200">
+                          <a:latin typeface="Cambria Math" charset="0"/>
+                        </a:rPr>
+                        <m:t>+</m:t>
+                      </m:r>
+                      <m:sSub>
+                        <m:sSubPr>
+                          <m:ctrlPr>
+                            <a:rPr lang="en-GB" sz="3200" i="1">
+                              <a:latin typeface="Cambria Math" panose="02040503050406030204" pitchFamily="18" charset="0"/>
+                            </a:rPr>
+                          </m:ctrlPr>
+                        </m:sSubPr>
+                        <m:e>
+                          <m:r>
+                            <a:rPr lang="en-GB" sz="3200" i="1">
+                              <a:latin typeface="Cambria Math" charset="0"/>
+                            </a:rPr>
+                            <m:t>𝜀</m:t>
+                          </m:r>
+                        </m:e>
+                        <m:sub>
+                          <m:r>
+                            <a:rPr lang="en-GB" sz="3200" i="1">
+                              <a:latin typeface="Cambria Math" charset="0"/>
+                            </a:rPr>
+                            <m:t>𝑖</m:t>
+                          </m:r>
+                        </m:sub>
+                      </m:sSub>
+                    </m:oMath>
+                  </m:oMathPara>
+                </a14:m>
+                <a:endParaRPr lang="en-GB" sz="3200" dirty="0"/>
+              </a:p>
+            </p:txBody>
+          </p:sp>
+        </mc:Choice>
+        <mc:Fallback xmlns="">
+          <p:sp>
+            <p:nvSpPr>
+              <p:cNvPr id="3" name="Rectangle 2"/>
+              <p:cNvSpPr>
+                <a:spLocks noRot="1" noChangeAspect="1" noMove="1" noResize="1" noEditPoints="1" noAdjustHandles="1" noChangeArrowheads="1" noChangeShapeType="1" noTextEdit="1"/>
+              </p:cNvSpPr>
+              <p:nvPr/>
+            </p:nvSpPr>
+            <p:spPr>
+              <a:xfrm>
+                <a:off x="1753401" y="4148984"/>
+                <a:ext cx="7849841" cy="584775"/>
+              </a:xfrm>
+              <a:prstGeom prst="rect">
+                <a:avLst/>
+              </a:prstGeom>
+              <a:blipFill>
+                <a:blip r:embed="rId3"/>
+                <a:stretch>
+                  <a:fillRect b="-8511"/>
+                </a:stretch>
+              </a:blipFill>
+            </p:spPr>
+            <p:txBody>
+              <a:bodyPr/>
+              <a:lstStyle/>
+              <a:p>
+                <a:r>
+                  <a:rPr lang="en-US">
+                    <a:noFill/>
+                  </a:rPr>
+                  <a:t> </a:t>
+                </a:r>
+              </a:p>
+            </p:txBody>
+          </p:sp>
+        </mc:Fallback>
+      </mc:AlternateContent>
+    </p:spTree>
+  </p:cSld>
+  <p:clrMapOvr>
+    <a:masterClrMapping/>
+  </p:clrMapOvr>
+</p:sld>
+</file>
+
+<file path=ppt/slides/slide11.xml><?xml version="1.0" encoding="utf-8"?>
 <p:sld xmlns:a="http://schemas.openxmlformats.org/drawingml/2006/main" xmlns:r="http://schemas.openxmlformats.org/officeDocument/2006/relationships" xmlns:p="http://schemas.openxmlformats.org/presentationml/2006/main" showMasterPhAnim="0">
   <p:cSld>
     <p:spTree>
@@ -6852,7 +7289,7 @@
 </p:sld>
 </file>
 
-<file path=ppt/slides/slide11.xml><?xml version="1.0" encoding="utf-8"?>
+<file path=ppt/slides/slide12.xml><?xml version="1.0" encoding="utf-8"?>
 <p:sld xmlns:a="http://schemas.openxmlformats.org/drawingml/2006/main" xmlns:r="http://schemas.openxmlformats.org/officeDocument/2006/relationships" xmlns:p="http://schemas.openxmlformats.org/presentationml/2006/main" showMasterPhAnim="0">
   <p:cSld>
     <p:spTree>
@@ -7213,7 +7650,7 @@
 </p:sld>
 </file>
 
-<file path=ppt/slides/slide12.xml><?xml version="1.0" encoding="utf-8"?>
+<file path=ppt/slides/slide13.xml><?xml version="1.0" encoding="utf-8"?>
 <p:sld xmlns:a="http://schemas.openxmlformats.org/drawingml/2006/main" xmlns:r="http://schemas.openxmlformats.org/officeDocument/2006/relationships" xmlns:p="http://schemas.openxmlformats.org/presentationml/2006/main">
   <p:cSld>
     <p:spTree>
@@ -7525,7 +7962,7 @@
 </p:sld>
 </file>
 
-<file path=ppt/slides/slide13.xml><?xml version="1.0" encoding="utf-8"?>
+<file path=ppt/slides/slide14.xml><?xml version="1.0" encoding="utf-8"?>
 <p:sld xmlns:a="http://schemas.openxmlformats.org/drawingml/2006/main" xmlns:r="http://schemas.openxmlformats.org/officeDocument/2006/relationships" xmlns:p="http://schemas.openxmlformats.org/presentationml/2006/main">
   <p:cSld>
     <p:spTree>
@@ -7868,7 +8305,7 @@
 </p:sld>
 </file>
 
-<file path=ppt/slides/slide14.xml><?xml version="1.0" encoding="utf-8"?>
+<file path=ppt/slides/slide15.xml><?xml version="1.0" encoding="utf-8"?>
 <p:sld xmlns:a="http://schemas.openxmlformats.org/drawingml/2006/main" xmlns:r="http://schemas.openxmlformats.org/officeDocument/2006/relationships" xmlns:p="http://schemas.openxmlformats.org/presentationml/2006/main">
   <p:cSld>
     <p:spTree>
@@ -8080,7 +8517,7 @@
 </p:sld>
 </file>
 
-<file path=ppt/slides/slide15.xml><?xml version="1.0" encoding="utf-8"?>
+<file path=ppt/slides/slide16.xml><?xml version="1.0" encoding="utf-8"?>
 <p:sld xmlns:a="http://schemas.openxmlformats.org/drawingml/2006/main" xmlns:r="http://schemas.openxmlformats.org/officeDocument/2006/relationships" xmlns:p="http://schemas.openxmlformats.org/presentationml/2006/main">
   <p:cSld>
     <p:spTree>
@@ -8479,7 +8916,7 @@
 </p:sld>
 </file>
 
-<file path=ppt/slides/slide16.xml><?xml version="1.0" encoding="utf-8"?>
+<file path=ppt/slides/slide17.xml><?xml version="1.0" encoding="utf-8"?>
 <p:sld xmlns:a="http://schemas.openxmlformats.org/drawingml/2006/main" xmlns:r="http://schemas.openxmlformats.org/officeDocument/2006/relationships" xmlns:p="http://schemas.openxmlformats.org/presentationml/2006/main" showMasterPhAnim="0">
   <p:cSld>
     <p:spTree>
@@ -8741,7 +9178,7 @@
 </p:sld>
 </file>
 
-<file path=ppt/slides/slide17.xml><?xml version="1.0" encoding="utf-8"?>
+<file path=ppt/slides/slide18.xml><?xml version="1.0" encoding="utf-8"?>
 <p:sld xmlns:a="http://schemas.openxmlformats.org/drawingml/2006/main" xmlns:r="http://schemas.openxmlformats.org/officeDocument/2006/relationships" xmlns:p="http://schemas.openxmlformats.org/presentationml/2006/main">
   <p:cSld>
     <p:spTree>
@@ -10211,7 +10648,7 @@
 </p:sld>
 </file>
 
-<file path=ppt/slides/slide18.xml><?xml version="1.0" encoding="utf-8"?>
+<file path=ppt/slides/slide19.xml><?xml version="1.0" encoding="utf-8"?>
 <p:sld xmlns:a="http://schemas.openxmlformats.org/drawingml/2006/main" xmlns:r="http://schemas.openxmlformats.org/officeDocument/2006/relationships" xmlns:p="http://schemas.openxmlformats.org/presentationml/2006/main">
   <p:cSld>
     <p:spTree>
@@ -10467,367 +10904,6 @@
   <p:clrMapOvr>
     <a:masterClrMapping/>
   </p:clrMapOvr>
-</p:sld>
-</file>
-
-<file path=ppt/slides/slide19.xml><?xml version="1.0" encoding="utf-8"?>
-<p:sld xmlns:a="http://schemas.openxmlformats.org/drawingml/2006/main" xmlns:r="http://schemas.openxmlformats.org/officeDocument/2006/relationships" xmlns:p="http://schemas.openxmlformats.org/presentationml/2006/main" showMasterPhAnim="0">
-  <p:cSld>
-    <p:spTree>
-      <p:nvGrpSpPr>
-        <p:cNvPr id="1" name=""/>
-        <p:cNvGrpSpPr/>
-        <p:nvPr/>
-      </p:nvGrpSpPr>
-      <p:grpSpPr>
-        <a:xfrm>
-          <a:off x="0" y="0"/>
-          <a:ext cx="0" cy="0"/>
-          <a:chOff x="0" y="0"/>
-          <a:chExt cx="0" cy="0"/>
-        </a:xfrm>
-      </p:grpSpPr>
-      <p:sp>
-        <p:nvSpPr>
-          <p:cNvPr id="260098" name="Rectangle 2"/>
-          <p:cNvSpPr>
-            <a:spLocks noGrp="1" noChangeArrowheads="1"/>
-          </p:cNvSpPr>
-          <p:nvPr>
-            <p:ph type="title"/>
-          </p:nvPr>
-        </p:nvSpPr>
-        <p:spPr>
-          <a:xfrm>
-            <a:off x="609599" y="228600"/>
-            <a:ext cx="10798629" cy="1117600"/>
-          </a:xfrm>
-          <a:noFill/>
-          <a:ln/>
-        </p:spPr>
-        <p:txBody>
-          <a:bodyPr/>
-          <a:lstStyle/>
-          <a:p>
-            <a:r>
-              <a:rPr lang="en-GB" sz="4000" i="1" dirty="0">
-                <a:sym typeface="Symbol" pitchFamily="18" charset="2"/>
-              </a:rPr>
-              <a:t>R</a:t>
-            </a:r>
-            <a:r>
-              <a:rPr lang="en-GB" sz="4000" dirty="0">
-                <a:sym typeface="Symbol" pitchFamily="18" charset="2"/>
-              </a:rPr>
-              <a:t> and </a:t>
-            </a:r>
-            <a:r>
-              <a:rPr lang="en-GB" sz="4000" i="1" dirty="0">
-                <a:sym typeface="Symbol" pitchFamily="18" charset="2"/>
-              </a:rPr>
-              <a:t>R</a:t>
-            </a:r>
-            <a:r>
-              <a:rPr lang="en-GB" sz="4000" i="1" baseline="30000" dirty="0">
-                <a:sym typeface="Symbol" pitchFamily="18" charset="2"/>
-              </a:rPr>
-              <a:t>2</a:t>
-            </a:r>
-            <a:r>
-              <a:rPr lang="en-GB" b="1" i="1" baseline="-25000" dirty="0"/>
-              <a:t> </a:t>
-            </a:r>
-          </a:p>
-        </p:txBody>
-      </p:sp>
-      <p:sp>
-        <p:nvSpPr>
-          <p:cNvPr id="260099" name="Rectangle 3"/>
-          <p:cNvSpPr>
-            <a:spLocks noGrp="1" noChangeArrowheads="1"/>
-          </p:cNvSpPr>
-          <p:nvPr>
-            <p:ph type="body" idx="1"/>
-          </p:nvPr>
-        </p:nvSpPr>
-        <p:spPr>
-          <a:xfrm>
-            <a:off x="957943" y="1403350"/>
-            <a:ext cx="10203543" cy="4641850"/>
-          </a:xfrm>
-          <a:noFill/>
-          <a:ln/>
-        </p:spPr>
-        <p:txBody>
-          <a:bodyPr>
-            <a:normAutofit/>
-          </a:bodyPr>
-          <a:lstStyle/>
-          <a:p>
-            <a:pPr>
-              <a:lnSpc>
-                <a:spcPct val="90000"/>
-              </a:lnSpc>
-            </a:pPr>
-            <a:r>
-              <a:rPr lang="en-GB" sz="3200" i="1" dirty="0"/>
-              <a:t>R</a:t>
-            </a:r>
-          </a:p>
-          <a:p>
-            <a:pPr lvl="1">
-              <a:lnSpc>
-                <a:spcPct val="90000"/>
-              </a:lnSpc>
-            </a:pPr>
-            <a:r>
-              <a:rPr lang="en-GB" sz="3200" dirty="0"/>
-              <a:t>The correlation between the observed values of the outcome, and the values predicted by the model.</a:t>
-            </a:r>
-          </a:p>
-          <a:p>
-            <a:pPr lvl="1">
-              <a:lnSpc>
-                <a:spcPct val="90000"/>
-              </a:lnSpc>
-            </a:pPr>
-            <a:endParaRPr lang="en-GB" sz="3200" dirty="0"/>
-          </a:p>
-          <a:p>
-            <a:pPr>
-              <a:lnSpc>
-                <a:spcPct val="90000"/>
-              </a:lnSpc>
-            </a:pPr>
-            <a:r>
-              <a:rPr lang="en-GB" sz="3200" i="1" dirty="0">
-                <a:sym typeface="Symbol" pitchFamily="18" charset="2"/>
-              </a:rPr>
-              <a:t>R</a:t>
-            </a:r>
-            <a:r>
-              <a:rPr lang="en-GB" sz="3200" baseline="30000" dirty="0">
-                <a:sym typeface="Symbol" pitchFamily="18" charset="2"/>
-              </a:rPr>
-              <a:t>2</a:t>
-            </a:r>
-          </a:p>
-          <a:p>
-            <a:pPr lvl="1">
-              <a:lnSpc>
-                <a:spcPct val="90000"/>
-              </a:lnSpc>
-            </a:pPr>
-            <a:r>
-              <a:rPr lang="en-GB" sz="3200" dirty="0"/>
-              <a:t>The proportion of variance accounted for by the model.</a:t>
-            </a:r>
-          </a:p>
-        </p:txBody>
-      </p:sp>
-    </p:spTree>
-    <p:extLst>
-      <p:ext uri="{BB962C8B-B14F-4D97-AF65-F5344CB8AC3E}">
-        <p14:creationId xmlns:p14="http://schemas.microsoft.com/office/powerpoint/2010/main" val="1137281447"/>
-      </p:ext>
-    </p:extLst>
-  </p:cSld>
-  <p:clrMapOvr>
-    <a:masterClrMapping/>
-  </p:clrMapOvr>
-  <p:timing>
-    <p:tnLst>
-      <p:par>
-        <p:cTn id="1" dur="indefinite" restart="never" nodeType="tmRoot">
-          <p:childTnLst>
-            <p:seq concurrent="1" nextAc="seek">
-              <p:cTn id="2" dur="indefinite" nodeType="mainSeq">
-                <p:childTnLst>
-                  <p:par>
-                    <p:cTn id="3" fill="hold">
-                      <p:stCondLst>
-                        <p:cond delay="indefinite"/>
-                      </p:stCondLst>
-                      <p:childTnLst>
-                        <p:par>
-                          <p:cTn id="4" fill="hold">
-                            <p:stCondLst>
-                              <p:cond delay="0"/>
-                            </p:stCondLst>
-                            <p:childTnLst>
-                              <p:par>
-                                <p:cTn id="5" presetID="1" presetClass="entr" presetSubtype="0" fill="hold" grpId="0" nodeType="clickEffect">
-                                  <p:stCondLst>
-                                    <p:cond delay="0"/>
-                                  </p:stCondLst>
-                                  <p:childTnLst>
-                                    <p:set>
-                                      <p:cBhvr>
-                                        <p:cTn id="6" dur="1" fill="hold">
-                                          <p:stCondLst>
-                                            <p:cond delay="0"/>
-                                          </p:stCondLst>
-                                        </p:cTn>
-                                        <p:tgtEl>
-                                          <p:spTgt spid="260099">
-                                            <p:txEl>
-                                              <p:pRg st="0" end="0"/>
-                                            </p:txEl>
-                                          </p:spTgt>
-                                        </p:tgtEl>
-                                        <p:attrNameLst>
-                                          <p:attrName>style.visibility</p:attrName>
-                                        </p:attrNameLst>
-                                      </p:cBhvr>
-                                      <p:to>
-                                        <p:strVal val="visible"/>
-                                      </p:to>
-                                    </p:set>
-                                  </p:childTnLst>
-                                </p:cTn>
-                              </p:par>
-                              <p:par>
-                                <p:cTn id="7" presetID="1" presetClass="entr" presetSubtype="0" fill="hold" grpId="0" nodeType="withEffect">
-                                  <p:stCondLst>
-                                    <p:cond delay="0"/>
-                                  </p:stCondLst>
-                                  <p:childTnLst>
-                                    <p:set>
-                                      <p:cBhvr>
-                                        <p:cTn id="8" dur="1" fill="hold">
-                                          <p:stCondLst>
-                                            <p:cond delay="0"/>
-                                          </p:stCondLst>
-                                        </p:cTn>
-                                        <p:tgtEl>
-                                          <p:spTgt spid="260099">
-                                            <p:txEl>
-                                              <p:pRg st="1" end="1"/>
-                                            </p:txEl>
-                                          </p:spTgt>
-                                        </p:tgtEl>
-                                        <p:attrNameLst>
-                                          <p:attrName>style.visibility</p:attrName>
-                                        </p:attrNameLst>
-                                      </p:cBhvr>
-                                      <p:to>
-                                        <p:strVal val="visible"/>
-                                      </p:to>
-                                    </p:set>
-                                  </p:childTnLst>
-                                </p:cTn>
-                              </p:par>
-                            </p:childTnLst>
-                          </p:cTn>
-                        </p:par>
-                      </p:childTnLst>
-                    </p:cTn>
-                  </p:par>
-                  <p:par>
-                    <p:cTn id="9" fill="hold">
-                      <p:stCondLst>
-                        <p:cond delay="indefinite"/>
-                      </p:stCondLst>
-                      <p:childTnLst>
-                        <p:par>
-                          <p:cTn id="10" fill="hold">
-                            <p:stCondLst>
-                              <p:cond delay="0"/>
-                            </p:stCondLst>
-                            <p:childTnLst>
-                              <p:par>
-                                <p:cTn id="11" presetID="1" presetClass="entr" presetSubtype="0" fill="hold" grpId="0" nodeType="clickEffect">
-                                  <p:stCondLst>
-                                    <p:cond delay="0"/>
-                                  </p:stCondLst>
-                                  <p:childTnLst>
-                                    <p:set>
-                                      <p:cBhvr>
-                                        <p:cTn id="12" dur="1" fill="hold">
-                                          <p:stCondLst>
-                                            <p:cond delay="0"/>
-                                          </p:stCondLst>
-                                        </p:cTn>
-                                        <p:tgtEl>
-                                          <p:spTgt spid="260099">
-                                            <p:txEl>
-                                              <p:pRg st="3" end="3"/>
-                                            </p:txEl>
-                                          </p:spTgt>
-                                        </p:tgtEl>
-                                        <p:attrNameLst>
-                                          <p:attrName>style.visibility</p:attrName>
-                                        </p:attrNameLst>
-                                      </p:cBhvr>
-                                      <p:to>
-                                        <p:strVal val="visible"/>
-                                      </p:to>
-                                    </p:set>
-                                  </p:childTnLst>
-                                </p:cTn>
-                              </p:par>
-                              <p:par>
-                                <p:cTn id="13" presetID="1" presetClass="entr" presetSubtype="0" fill="hold" grpId="0" nodeType="withEffect">
-                                  <p:stCondLst>
-                                    <p:cond delay="0"/>
-                                  </p:stCondLst>
-                                  <p:childTnLst>
-                                    <p:set>
-                                      <p:cBhvr>
-                                        <p:cTn id="14" dur="1" fill="hold">
-                                          <p:stCondLst>
-                                            <p:cond delay="0"/>
-                                          </p:stCondLst>
-                                        </p:cTn>
-                                        <p:tgtEl>
-                                          <p:spTgt spid="260099">
-                                            <p:txEl>
-                                              <p:pRg st="4" end="4"/>
-                                            </p:txEl>
-                                          </p:spTgt>
-                                        </p:tgtEl>
-                                        <p:attrNameLst>
-                                          <p:attrName>style.visibility</p:attrName>
-                                        </p:attrNameLst>
-                                      </p:cBhvr>
-                                      <p:to>
-                                        <p:strVal val="visible"/>
-                                      </p:to>
-                                    </p:set>
-                                  </p:childTnLst>
-                                </p:cTn>
-                              </p:par>
-                            </p:childTnLst>
-                          </p:cTn>
-                        </p:par>
-                      </p:childTnLst>
-                    </p:cTn>
-                  </p:par>
-                </p:childTnLst>
-              </p:cTn>
-              <p:prevCondLst>
-                <p:cond evt="onPrev" delay="0">
-                  <p:tgtEl>
-                    <p:sldTgt/>
-                  </p:tgtEl>
-                </p:cond>
-              </p:prevCondLst>
-              <p:nextCondLst>
-                <p:cond evt="onNext" delay="0">
-                  <p:tgtEl>
-                    <p:sldTgt/>
-                  </p:tgtEl>
-                </p:cond>
-              </p:nextCondLst>
-            </p:seq>
-          </p:childTnLst>
-        </p:cTn>
-      </p:par>
-    </p:tnLst>
-    <p:bldLst>
-      <p:bldP spid="260099" grpId="0" uiExpand="1" build="p"/>
-    </p:bldLst>
-  </p:timing>
 </p:sld>
 </file>
 
@@ -11201,6 +11277,367 @@
 </file>
 
 <file path=ppt/slides/slide20.xml><?xml version="1.0" encoding="utf-8"?>
+<p:sld xmlns:a="http://schemas.openxmlformats.org/drawingml/2006/main" xmlns:r="http://schemas.openxmlformats.org/officeDocument/2006/relationships" xmlns:p="http://schemas.openxmlformats.org/presentationml/2006/main" showMasterPhAnim="0">
+  <p:cSld>
+    <p:spTree>
+      <p:nvGrpSpPr>
+        <p:cNvPr id="1" name=""/>
+        <p:cNvGrpSpPr/>
+        <p:nvPr/>
+      </p:nvGrpSpPr>
+      <p:grpSpPr>
+        <a:xfrm>
+          <a:off x="0" y="0"/>
+          <a:ext cx="0" cy="0"/>
+          <a:chOff x="0" y="0"/>
+          <a:chExt cx="0" cy="0"/>
+        </a:xfrm>
+      </p:grpSpPr>
+      <p:sp>
+        <p:nvSpPr>
+          <p:cNvPr id="260098" name="Rectangle 2"/>
+          <p:cNvSpPr>
+            <a:spLocks noGrp="1" noChangeArrowheads="1"/>
+          </p:cNvSpPr>
+          <p:nvPr>
+            <p:ph type="title"/>
+          </p:nvPr>
+        </p:nvSpPr>
+        <p:spPr>
+          <a:xfrm>
+            <a:off x="609599" y="228600"/>
+            <a:ext cx="10798629" cy="1117600"/>
+          </a:xfrm>
+          <a:noFill/>
+          <a:ln/>
+        </p:spPr>
+        <p:txBody>
+          <a:bodyPr/>
+          <a:lstStyle/>
+          <a:p>
+            <a:r>
+              <a:rPr lang="en-GB" sz="4000" i="1" dirty="0">
+                <a:sym typeface="Symbol" pitchFamily="18" charset="2"/>
+              </a:rPr>
+              <a:t>R</a:t>
+            </a:r>
+            <a:r>
+              <a:rPr lang="en-GB" sz="4000" dirty="0">
+                <a:sym typeface="Symbol" pitchFamily="18" charset="2"/>
+              </a:rPr>
+              <a:t> and </a:t>
+            </a:r>
+            <a:r>
+              <a:rPr lang="en-GB" sz="4000" i="1" dirty="0">
+                <a:sym typeface="Symbol" pitchFamily="18" charset="2"/>
+              </a:rPr>
+              <a:t>R</a:t>
+            </a:r>
+            <a:r>
+              <a:rPr lang="en-GB" sz="4000" i="1" baseline="30000" dirty="0">
+                <a:sym typeface="Symbol" pitchFamily="18" charset="2"/>
+              </a:rPr>
+              <a:t>2</a:t>
+            </a:r>
+            <a:r>
+              <a:rPr lang="en-GB" b="1" i="1" baseline="-25000" dirty="0"/>
+              <a:t> </a:t>
+            </a:r>
+          </a:p>
+        </p:txBody>
+      </p:sp>
+      <p:sp>
+        <p:nvSpPr>
+          <p:cNvPr id="260099" name="Rectangle 3"/>
+          <p:cNvSpPr>
+            <a:spLocks noGrp="1" noChangeArrowheads="1"/>
+          </p:cNvSpPr>
+          <p:nvPr>
+            <p:ph type="body" idx="1"/>
+          </p:nvPr>
+        </p:nvSpPr>
+        <p:spPr>
+          <a:xfrm>
+            <a:off x="957943" y="1403350"/>
+            <a:ext cx="10203543" cy="4641850"/>
+          </a:xfrm>
+          <a:noFill/>
+          <a:ln/>
+        </p:spPr>
+        <p:txBody>
+          <a:bodyPr>
+            <a:normAutofit/>
+          </a:bodyPr>
+          <a:lstStyle/>
+          <a:p>
+            <a:pPr>
+              <a:lnSpc>
+                <a:spcPct val="90000"/>
+              </a:lnSpc>
+            </a:pPr>
+            <a:r>
+              <a:rPr lang="en-GB" sz="3200" i="1" dirty="0"/>
+              <a:t>R</a:t>
+            </a:r>
+          </a:p>
+          <a:p>
+            <a:pPr lvl="1">
+              <a:lnSpc>
+                <a:spcPct val="90000"/>
+              </a:lnSpc>
+            </a:pPr>
+            <a:r>
+              <a:rPr lang="en-GB" sz="3200" dirty="0"/>
+              <a:t>The correlation between the observed values of the outcome, and the values predicted by the model.</a:t>
+            </a:r>
+          </a:p>
+          <a:p>
+            <a:pPr lvl="1">
+              <a:lnSpc>
+                <a:spcPct val="90000"/>
+              </a:lnSpc>
+            </a:pPr>
+            <a:endParaRPr lang="en-GB" sz="3200" dirty="0"/>
+          </a:p>
+          <a:p>
+            <a:pPr>
+              <a:lnSpc>
+                <a:spcPct val="90000"/>
+              </a:lnSpc>
+            </a:pPr>
+            <a:r>
+              <a:rPr lang="en-GB" sz="3200" i="1" dirty="0">
+                <a:sym typeface="Symbol" pitchFamily="18" charset="2"/>
+              </a:rPr>
+              <a:t>R</a:t>
+            </a:r>
+            <a:r>
+              <a:rPr lang="en-GB" sz="3200" baseline="30000" dirty="0">
+                <a:sym typeface="Symbol" pitchFamily="18" charset="2"/>
+              </a:rPr>
+              <a:t>2</a:t>
+            </a:r>
+          </a:p>
+          <a:p>
+            <a:pPr lvl="1">
+              <a:lnSpc>
+                <a:spcPct val="90000"/>
+              </a:lnSpc>
+            </a:pPr>
+            <a:r>
+              <a:rPr lang="en-GB" sz="3200" dirty="0"/>
+              <a:t>The proportion of variance accounted for by the model.</a:t>
+            </a:r>
+          </a:p>
+        </p:txBody>
+      </p:sp>
+    </p:spTree>
+    <p:extLst>
+      <p:ext uri="{BB962C8B-B14F-4D97-AF65-F5344CB8AC3E}">
+        <p14:creationId xmlns:p14="http://schemas.microsoft.com/office/powerpoint/2010/main" val="1137281447"/>
+      </p:ext>
+    </p:extLst>
+  </p:cSld>
+  <p:clrMapOvr>
+    <a:masterClrMapping/>
+  </p:clrMapOvr>
+  <p:timing>
+    <p:tnLst>
+      <p:par>
+        <p:cTn id="1" dur="indefinite" restart="never" nodeType="tmRoot">
+          <p:childTnLst>
+            <p:seq concurrent="1" nextAc="seek">
+              <p:cTn id="2" dur="indefinite" nodeType="mainSeq">
+                <p:childTnLst>
+                  <p:par>
+                    <p:cTn id="3" fill="hold">
+                      <p:stCondLst>
+                        <p:cond delay="indefinite"/>
+                      </p:stCondLst>
+                      <p:childTnLst>
+                        <p:par>
+                          <p:cTn id="4" fill="hold">
+                            <p:stCondLst>
+                              <p:cond delay="0"/>
+                            </p:stCondLst>
+                            <p:childTnLst>
+                              <p:par>
+                                <p:cTn id="5" presetID="1" presetClass="entr" presetSubtype="0" fill="hold" grpId="0" nodeType="clickEffect">
+                                  <p:stCondLst>
+                                    <p:cond delay="0"/>
+                                  </p:stCondLst>
+                                  <p:childTnLst>
+                                    <p:set>
+                                      <p:cBhvr>
+                                        <p:cTn id="6" dur="1" fill="hold">
+                                          <p:stCondLst>
+                                            <p:cond delay="0"/>
+                                          </p:stCondLst>
+                                        </p:cTn>
+                                        <p:tgtEl>
+                                          <p:spTgt spid="260099">
+                                            <p:txEl>
+                                              <p:pRg st="0" end="0"/>
+                                            </p:txEl>
+                                          </p:spTgt>
+                                        </p:tgtEl>
+                                        <p:attrNameLst>
+                                          <p:attrName>style.visibility</p:attrName>
+                                        </p:attrNameLst>
+                                      </p:cBhvr>
+                                      <p:to>
+                                        <p:strVal val="visible"/>
+                                      </p:to>
+                                    </p:set>
+                                  </p:childTnLst>
+                                </p:cTn>
+                              </p:par>
+                              <p:par>
+                                <p:cTn id="7" presetID="1" presetClass="entr" presetSubtype="0" fill="hold" grpId="0" nodeType="withEffect">
+                                  <p:stCondLst>
+                                    <p:cond delay="0"/>
+                                  </p:stCondLst>
+                                  <p:childTnLst>
+                                    <p:set>
+                                      <p:cBhvr>
+                                        <p:cTn id="8" dur="1" fill="hold">
+                                          <p:stCondLst>
+                                            <p:cond delay="0"/>
+                                          </p:stCondLst>
+                                        </p:cTn>
+                                        <p:tgtEl>
+                                          <p:spTgt spid="260099">
+                                            <p:txEl>
+                                              <p:pRg st="1" end="1"/>
+                                            </p:txEl>
+                                          </p:spTgt>
+                                        </p:tgtEl>
+                                        <p:attrNameLst>
+                                          <p:attrName>style.visibility</p:attrName>
+                                        </p:attrNameLst>
+                                      </p:cBhvr>
+                                      <p:to>
+                                        <p:strVal val="visible"/>
+                                      </p:to>
+                                    </p:set>
+                                  </p:childTnLst>
+                                </p:cTn>
+                              </p:par>
+                            </p:childTnLst>
+                          </p:cTn>
+                        </p:par>
+                      </p:childTnLst>
+                    </p:cTn>
+                  </p:par>
+                  <p:par>
+                    <p:cTn id="9" fill="hold">
+                      <p:stCondLst>
+                        <p:cond delay="indefinite"/>
+                      </p:stCondLst>
+                      <p:childTnLst>
+                        <p:par>
+                          <p:cTn id="10" fill="hold">
+                            <p:stCondLst>
+                              <p:cond delay="0"/>
+                            </p:stCondLst>
+                            <p:childTnLst>
+                              <p:par>
+                                <p:cTn id="11" presetID="1" presetClass="entr" presetSubtype="0" fill="hold" grpId="0" nodeType="clickEffect">
+                                  <p:stCondLst>
+                                    <p:cond delay="0"/>
+                                  </p:stCondLst>
+                                  <p:childTnLst>
+                                    <p:set>
+                                      <p:cBhvr>
+                                        <p:cTn id="12" dur="1" fill="hold">
+                                          <p:stCondLst>
+                                            <p:cond delay="0"/>
+                                          </p:stCondLst>
+                                        </p:cTn>
+                                        <p:tgtEl>
+                                          <p:spTgt spid="260099">
+                                            <p:txEl>
+                                              <p:pRg st="3" end="3"/>
+                                            </p:txEl>
+                                          </p:spTgt>
+                                        </p:tgtEl>
+                                        <p:attrNameLst>
+                                          <p:attrName>style.visibility</p:attrName>
+                                        </p:attrNameLst>
+                                      </p:cBhvr>
+                                      <p:to>
+                                        <p:strVal val="visible"/>
+                                      </p:to>
+                                    </p:set>
+                                  </p:childTnLst>
+                                </p:cTn>
+                              </p:par>
+                              <p:par>
+                                <p:cTn id="13" presetID="1" presetClass="entr" presetSubtype="0" fill="hold" grpId="0" nodeType="withEffect">
+                                  <p:stCondLst>
+                                    <p:cond delay="0"/>
+                                  </p:stCondLst>
+                                  <p:childTnLst>
+                                    <p:set>
+                                      <p:cBhvr>
+                                        <p:cTn id="14" dur="1" fill="hold">
+                                          <p:stCondLst>
+                                            <p:cond delay="0"/>
+                                          </p:stCondLst>
+                                        </p:cTn>
+                                        <p:tgtEl>
+                                          <p:spTgt spid="260099">
+                                            <p:txEl>
+                                              <p:pRg st="4" end="4"/>
+                                            </p:txEl>
+                                          </p:spTgt>
+                                        </p:tgtEl>
+                                        <p:attrNameLst>
+                                          <p:attrName>style.visibility</p:attrName>
+                                        </p:attrNameLst>
+                                      </p:cBhvr>
+                                      <p:to>
+                                        <p:strVal val="visible"/>
+                                      </p:to>
+                                    </p:set>
+                                  </p:childTnLst>
+                                </p:cTn>
+                              </p:par>
+                            </p:childTnLst>
+                          </p:cTn>
+                        </p:par>
+                      </p:childTnLst>
+                    </p:cTn>
+                  </p:par>
+                </p:childTnLst>
+              </p:cTn>
+              <p:prevCondLst>
+                <p:cond evt="onPrev" delay="0">
+                  <p:tgtEl>
+                    <p:sldTgt/>
+                  </p:tgtEl>
+                </p:cond>
+              </p:prevCondLst>
+              <p:nextCondLst>
+                <p:cond evt="onNext" delay="0">
+                  <p:tgtEl>
+                    <p:sldTgt/>
+                  </p:tgtEl>
+                </p:cond>
+              </p:nextCondLst>
+            </p:seq>
+          </p:childTnLst>
+        </p:cTn>
+      </p:par>
+    </p:tnLst>
+    <p:bldLst>
+      <p:bldP spid="260099" grpId="0" uiExpand="1" build="p"/>
+    </p:bldLst>
+  </p:timing>
+</p:sld>
+</file>
+
+<file path=ppt/slides/slide21.xml><?xml version="1.0" encoding="utf-8"?>
 <p:sld xmlns:a="http://schemas.openxmlformats.org/drawingml/2006/main" xmlns:r="http://schemas.openxmlformats.org/officeDocument/2006/relationships" xmlns:p="http://schemas.openxmlformats.org/presentationml/2006/main">
   <p:cSld>
     <p:spTree>
@@ -11485,7 +11922,7 @@
 </p:sld>
 </file>
 
-<file path=ppt/slides/slide21.xml><?xml version="1.0" encoding="utf-8"?>
+<file path=ppt/slides/slide22.xml><?xml version="1.0" encoding="utf-8"?>
 <p:sld xmlns:a="http://schemas.openxmlformats.org/drawingml/2006/main" xmlns:r="http://schemas.openxmlformats.org/officeDocument/2006/relationships" xmlns:p="http://schemas.openxmlformats.org/presentationml/2006/main">
   <p:cSld>
     <p:spTree>
@@ -11798,7 +12235,7 @@
 </p:sld>
 </file>
 
-<file path=ppt/slides/slide22.xml><?xml version="1.0" encoding="utf-8"?>
+<file path=ppt/slides/slide23.xml><?xml version="1.0" encoding="utf-8"?>
 <p:sld xmlns:a="http://schemas.openxmlformats.org/drawingml/2006/main" xmlns:r="http://schemas.openxmlformats.org/officeDocument/2006/relationships" xmlns:p="http://schemas.openxmlformats.org/presentationml/2006/main" showMasterPhAnim="0">
   <p:cSld>
     <p:spTree>
@@ -12081,7 +12518,7 @@
 </p:sld>
 </file>
 
-<file path=ppt/slides/slide23.xml><?xml version="1.0" encoding="utf-8"?>
+<file path=ppt/slides/slide24.xml><?xml version="1.0" encoding="utf-8"?>
 <p:sld xmlns:a="http://schemas.openxmlformats.org/drawingml/2006/main" xmlns:r="http://schemas.openxmlformats.org/officeDocument/2006/relationships" xmlns:p="http://schemas.openxmlformats.org/presentationml/2006/main" showMasterPhAnim="0">
   <p:cSld>
     <p:spTree>
@@ -12448,7 +12885,7 @@
 </p:sld>
 </file>
 
-<file path=ppt/slides/slide24.xml><?xml version="1.0" encoding="utf-8"?>
+<file path=ppt/slides/slide25.xml><?xml version="1.0" encoding="utf-8"?>
 <p:sld xmlns:a="http://schemas.openxmlformats.org/drawingml/2006/main" xmlns:r="http://schemas.openxmlformats.org/officeDocument/2006/relationships" xmlns:p="http://schemas.openxmlformats.org/presentationml/2006/main" showMasterPhAnim="0">
   <p:cSld>
     <p:spTree>
@@ -12730,7 +13167,7 @@
 </p:sld>
 </file>
 
-<file path=ppt/slides/slide25.xml><?xml version="1.0" encoding="utf-8"?>
+<file path=ppt/slides/slide26.xml><?xml version="1.0" encoding="utf-8"?>
 <p:sld xmlns:a="http://schemas.openxmlformats.org/drawingml/2006/main" xmlns:r="http://schemas.openxmlformats.org/officeDocument/2006/relationships" xmlns:p="http://schemas.openxmlformats.org/presentationml/2006/main" showMasterPhAnim="0">
   <p:cSld>
     <p:spTree>
@@ -12958,7 +13395,7 @@
 </p:sld>
 </file>
 
-<file path=ppt/slides/slide26.xml><?xml version="1.0" encoding="utf-8"?>
+<file path=ppt/slides/slide27.xml><?xml version="1.0" encoding="utf-8"?>
 <p:sld xmlns:a="http://schemas.openxmlformats.org/drawingml/2006/main" xmlns:r="http://schemas.openxmlformats.org/officeDocument/2006/relationships" xmlns:p="http://schemas.openxmlformats.org/presentationml/2006/main" showMasterPhAnim="0">
   <p:cSld>
     <p:spTree>
@@ -13327,7 +13764,7 @@
 </p:sld>
 </file>
 
-<file path=ppt/slides/slide27.xml><?xml version="1.0" encoding="utf-8"?>
+<file path=ppt/slides/slide28.xml><?xml version="1.0" encoding="utf-8"?>
 <p:sld xmlns:a="http://schemas.openxmlformats.org/drawingml/2006/main" xmlns:r="http://schemas.openxmlformats.org/officeDocument/2006/relationships" xmlns:p="http://schemas.openxmlformats.org/presentationml/2006/main" showMasterPhAnim="0">
   <p:cSld>
     <p:spTree>
@@ -13638,7 +14075,7 @@
 </p:sld>
 </file>
 
-<file path=ppt/slides/slide28.xml><?xml version="1.0" encoding="utf-8"?>
+<file path=ppt/slides/slide29.xml><?xml version="1.0" encoding="utf-8"?>
 <p:sld xmlns:a="http://schemas.openxmlformats.org/drawingml/2006/main" xmlns:r="http://schemas.openxmlformats.org/officeDocument/2006/relationships" xmlns:p="http://schemas.openxmlformats.org/presentationml/2006/main">
   <p:cSld>
     <p:spTree>
@@ -13720,7 +14157,118 @@
 </p:sld>
 </file>
 
-<file path=ppt/slides/slide29.xml><?xml version="1.0" encoding="utf-8"?>
+<file path=ppt/slides/slide3.xml><?xml version="1.0" encoding="utf-8"?>
+<p:sld xmlns:a="http://schemas.openxmlformats.org/drawingml/2006/main" xmlns:r="http://schemas.openxmlformats.org/officeDocument/2006/relationships" xmlns:p="http://schemas.openxmlformats.org/presentationml/2006/main">
+  <p:cSld>
+    <p:spTree>
+      <p:nvGrpSpPr>
+        <p:cNvPr id="1" name=""/>
+        <p:cNvGrpSpPr/>
+        <p:nvPr/>
+      </p:nvGrpSpPr>
+      <p:grpSpPr>
+        <a:xfrm>
+          <a:off x="0" y="0"/>
+          <a:ext cx="0" cy="0"/>
+          <a:chOff x="0" y="0"/>
+          <a:chExt cx="0" cy="0"/>
+        </a:xfrm>
+      </p:grpSpPr>
+      <p:sp>
+        <p:nvSpPr>
+          <p:cNvPr id="2" name="Title 1">
+            <a:extLst>
+              <a:ext uri="{FF2B5EF4-FFF2-40B4-BE49-F238E27FC236}">
+                <a16:creationId xmlns:a16="http://schemas.microsoft.com/office/drawing/2014/main" id="{61726DFE-F253-0B25-55E2-650C2D18F0E1}"/>
+              </a:ext>
+            </a:extLst>
+          </p:cNvPr>
+          <p:cNvSpPr>
+            <a:spLocks noGrp="1"/>
+          </p:cNvSpPr>
+          <p:nvPr>
+            <p:ph type="title"/>
+          </p:nvPr>
+        </p:nvSpPr>
+        <p:spPr/>
+        <p:txBody>
+          <a:bodyPr/>
+          <a:lstStyle/>
+          <a:p>
+            <a:r>
+              <a:rPr lang="en-US" dirty="0"/>
+              <a:t>But first let’s be clear about how we use the word “prediction”</a:t>
+            </a:r>
+          </a:p>
+        </p:txBody>
+      </p:sp>
+      <p:sp>
+        <p:nvSpPr>
+          <p:cNvPr id="3" name="Content Placeholder 2">
+            <a:extLst>
+              <a:ext uri="{FF2B5EF4-FFF2-40B4-BE49-F238E27FC236}">
+                <a16:creationId xmlns:a16="http://schemas.microsoft.com/office/drawing/2014/main" id="{E1B495DE-B251-9FD9-5F7C-5622560C3914}"/>
+              </a:ext>
+            </a:extLst>
+          </p:cNvPr>
+          <p:cNvSpPr>
+            <a:spLocks noGrp="1"/>
+          </p:cNvSpPr>
+          <p:nvPr>
+            <p:ph idx="1"/>
+          </p:nvPr>
+        </p:nvSpPr>
+        <p:spPr/>
+        <p:txBody>
+          <a:bodyPr/>
+          <a:lstStyle/>
+          <a:p>
+            <a:r>
+              <a:rPr lang="en-US" dirty="0"/>
+              <a:t>Today we will use it generally, to mean that if you know the value(s) of X for some data point, then you can make a “prediction” about the value of Y for that data point.</a:t>
+            </a:r>
+          </a:p>
+          <a:p>
+            <a:pPr lvl="1"/>
+            <a:r>
+              <a:rPr lang="en-US" dirty="0"/>
+              <a:t>Equivalent to </a:t>
+            </a:r>
+            <a:r>
+              <a:rPr lang="en-US"/>
+              <a:t>“explain”</a:t>
+            </a:r>
+            <a:endParaRPr lang="en-US" dirty="0"/>
+          </a:p>
+          <a:p>
+            <a:r>
+              <a:rPr lang="en-US" dirty="0"/>
+              <a:t>The same word is also used in a more strict sense:</a:t>
+            </a:r>
+          </a:p>
+          <a:p>
+            <a:pPr lvl="1"/>
+            <a:r>
+              <a:rPr lang="en-US" dirty="0"/>
+              <a:t>Change in X must come before change in Y</a:t>
+            </a:r>
+          </a:p>
+        </p:txBody>
+      </p:sp>
+    </p:spTree>
+    <p:extLst>
+      <p:ext uri="{BB962C8B-B14F-4D97-AF65-F5344CB8AC3E}">
+        <p14:creationId xmlns:p14="http://schemas.microsoft.com/office/powerpoint/2010/main" val="2548137433"/>
+      </p:ext>
+    </p:extLst>
+  </p:cSld>
+  <p:clrMapOvr>
+    <a:masterClrMapping/>
+  </p:clrMapOvr>
+</p:sld>
+</file>
+
+<file path=ppt/slides/slide30.xml><?xml version="1.0" encoding="utf-8"?>
 <p:sld xmlns:a="http://schemas.openxmlformats.org/drawingml/2006/main" xmlns:r="http://schemas.openxmlformats.org/officeDocument/2006/relationships" xmlns:p="http://schemas.openxmlformats.org/presentationml/2006/main">
   <p:cSld>
     <p:spTree>
@@ -13802,242 +14350,7 @@
 </p:sld>
 </file>
 
-<file path=ppt/slides/slide3.xml><?xml version="1.0" encoding="utf-8"?>
-<p:sld xmlns:a="http://schemas.openxmlformats.org/drawingml/2006/main" xmlns:r="http://schemas.openxmlformats.org/officeDocument/2006/relationships" xmlns:p="http://schemas.openxmlformats.org/presentationml/2006/main">
-  <p:cSld>
-    <p:spTree>
-      <p:nvGrpSpPr>
-        <p:cNvPr id="1" name=""/>
-        <p:cNvGrpSpPr/>
-        <p:nvPr/>
-      </p:nvGrpSpPr>
-      <p:grpSpPr>
-        <a:xfrm>
-          <a:off x="0" y="0"/>
-          <a:ext cx="0" cy="0"/>
-          <a:chOff x="0" y="0"/>
-          <a:chExt cx="0" cy="0"/>
-        </a:xfrm>
-      </p:grpSpPr>
-      <p:sp>
-        <p:nvSpPr>
-          <p:cNvPr id="2" name="Title 1">
-            <a:extLst>
-              <a:ext uri="{FF2B5EF4-FFF2-40B4-BE49-F238E27FC236}">
-                <a16:creationId xmlns:a16="http://schemas.microsoft.com/office/drawing/2014/main" id="{CC91C766-667F-6548-9059-FC038E747AE7}"/>
-              </a:ext>
-            </a:extLst>
-          </p:cNvPr>
-          <p:cNvSpPr>
-            <a:spLocks noGrp="1"/>
-          </p:cNvSpPr>
-          <p:nvPr>
-            <p:ph type="title"/>
-          </p:nvPr>
-        </p:nvSpPr>
-        <p:spPr/>
-        <p:txBody>
-          <a:bodyPr/>
-          <a:lstStyle/>
-          <a:p>
-            <a:r>
-              <a:rPr lang="en-US" dirty="0"/>
-              <a:t>Do you remember…?</a:t>
-            </a:r>
-          </a:p>
-        </p:txBody>
-      </p:sp>
-      <p:pic>
-        <p:nvPicPr>
-          <p:cNvPr id="4" name="Picture 3">
-            <a:extLst>
-              <a:ext uri="{FF2B5EF4-FFF2-40B4-BE49-F238E27FC236}">
-                <a16:creationId xmlns:a16="http://schemas.microsoft.com/office/drawing/2014/main" id="{DE7CF31B-9DEC-4644-8235-59E139659C22}"/>
-              </a:ext>
-            </a:extLst>
-          </p:cNvPr>
-          <p:cNvPicPr>
-            <a:picLocks noChangeAspect="1"/>
-          </p:cNvPicPr>
-          <p:nvPr/>
-        </p:nvPicPr>
-        <p:blipFill>
-          <a:blip r:embed="rId2"/>
-          <a:stretch>
-            <a:fillRect/>
-          </a:stretch>
-        </p:blipFill>
-        <p:spPr>
-          <a:xfrm>
-            <a:off x="2876549" y="1927478"/>
-            <a:ext cx="6071507" cy="4565397"/>
-          </a:xfrm>
-          <a:prstGeom prst="rect">
-            <a:avLst/>
-          </a:prstGeom>
-        </p:spPr>
-      </p:pic>
-      <p:sp>
-        <p:nvSpPr>
-          <p:cNvPr id="5" name="Rectangle 4">
-            <a:extLst>
-              <a:ext uri="{FF2B5EF4-FFF2-40B4-BE49-F238E27FC236}">
-                <a16:creationId xmlns:a16="http://schemas.microsoft.com/office/drawing/2014/main" id="{2AF80B6B-B6EF-844D-B50C-7B597F7213DC}"/>
-              </a:ext>
-            </a:extLst>
-          </p:cNvPr>
-          <p:cNvSpPr/>
-          <p:nvPr/>
-        </p:nvSpPr>
-        <p:spPr>
-          <a:xfrm>
-            <a:off x="1959429" y="4036303"/>
-            <a:ext cx="8229600" cy="2642084"/>
-          </a:xfrm>
-          <a:prstGeom prst="rect">
-            <a:avLst/>
-          </a:prstGeom>
-          <a:solidFill>
-            <a:schemeClr val="bg1"/>
-          </a:solidFill>
-          <a:ln>
-            <a:noFill/>
-          </a:ln>
-        </p:spPr>
-        <p:style>
-          <a:lnRef idx="2">
-            <a:schemeClr val="accent1">
-              <a:shade val="50000"/>
-            </a:schemeClr>
-          </a:lnRef>
-          <a:fillRef idx="1">
-            <a:schemeClr val="accent1"/>
-          </a:fillRef>
-          <a:effectRef idx="0">
-            <a:schemeClr val="accent1"/>
-          </a:effectRef>
-          <a:fontRef idx="minor">
-            <a:schemeClr val="lt1"/>
-          </a:fontRef>
-        </p:style>
-        <p:txBody>
-          <a:bodyPr rtlCol="0" anchor="ctr"/>
-          <a:lstStyle/>
-          <a:p>
-            <a:pPr algn="ctr"/>
-            <a:endParaRPr lang="en-US" dirty="0">
-              <a:solidFill>
-                <a:schemeClr val="bg1"/>
-              </a:solidFill>
-            </a:endParaRPr>
-          </a:p>
-        </p:txBody>
-      </p:sp>
-      <p:sp>
-        <p:nvSpPr>
-          <p:cNvPr id="6" name="Rectangle 5">
-            <a:extLst>
-              <a:ext uri="{FF2B5EF4-FFF2-40B4-BE49-F238E27FC236}">
-                <a16:creationId xmlns:a16="http://schemas.microsoft.com/office/drawing/2014/main" id="{D62302A2-F633-6B42-9C38-37DC221465EF}"/>
-              </a:ext>
-            </a:extLst>
-          </p:cNvPr>
-          <p:cNvSpPr/>
-          <p:nvPr/>
-        </p:nvSpPr>
-        <p:spPr>
-          <a:xfrm>
-            <a:off x="2349306" y="1927478"/>
-            <a:ext cx="7638756" cy="894220"/>
-          </a:xfrm>
-          <a:prstGeom prst="rect">
-            <a:avLst/>
-          </a:prstGeom>
-          <a:solidFill>
-            <a:schemeClr val="bg1"/>
-          </a:solidFill>
-          <a:ln>
-            <a:noFill/>
-          </a:ln>
-        </p:spPr>
-        <p:style>
-          <a:lnRef idx="2">
-            <a:schemeClr val="accent1">
-              <a:shade val="50000"/>
-            </a:schemeClr>
-          </a:lnRef>
-          <a:fillRef idx="1">
-            <a:schemeClr val="accent1"/>
-          </a:fillRef>
-          <a:effectRef idx="0">
-            <a:schemeClr val="accent1"/>
-          </a:effectRef>
-          <a:fontRef idx="minor">
-            <a:schemeClr val="lt1"/>
-          </a:fontRef>
-        </p:style>
-        <p:txBody>
-          <a:bodyPr rtlCol="0" anchor="ctr"/>
-          <a:lstStyle/>
-          <a:p>
-            <a:pPr algn="ctr"/>
-            <a:endParaRPr lang="en-US">
-              <a:solidFill>
-                <a:schemeClr val="bg1"/>
-              </a:solidFill>
-            </a:endParaRPr>
-          </a:p>
-        </p:txBody>
-      </p:sp>
-      <p:sp>
-        <p:nvSpPr>
-          <p:cNvPr id="3" name="TextBox 2">
-            <a:extLst>
-              <a:ext uri="{FF2B5EF4-FFF2-40B4-BE49-F238E27FC236}">
-                <a16:creationId xmlns:a16="http://schemas.microsoft.com/office/drawing/2014/main" id="{A03F7B4C-AE99-5D7D-3484-DE5414D670F5}"/>
-              </a:ext>
-            </a:extLst>
-          </p:cNvPr>
-          <p:cNvSpPr txBox="1"/>
-          <p:nvPr/>
-        </p:nvSpPr>
-        <p:spPr>
-          <a:xfrm>
-            <a:off x="4140342" y="5167313"/>
-            <a:ext cx="3543919" cy="461665"/>
-          </a:xfrm>
-          <a:prstGeom prst="rect">
-            <a:avLst/>
-          </a:prstGeom>
-          <a:noFill/>
-        </p:spPr>
-        <p:txBody>
-          <a:bodyPr wrap="none" rtlCol="0">
-            <a:spAutoFit/>
-          </a:bodyPr>
-          <a:lstStyle/>
-          <a:p>
-            <a:r>
-              <a:rPr lang="en-US" sz="2400" dirty="0"/>
-              <a:t>Thank your math teachers!</a:t>
-            </a:r>
-          </a:p>
-        </p:txBody>
-      </p:sp>
-    </p:spTree>
-    <p:extLst>
-      <p:ext uri="{BB962C8B-B14F-4D97-AF65-F5344CB8AC3E}">
-        <p14:creationId xmlns:p14="http://schemas.microsoft.com/office/powerpoint/2010/main" val="2008238407"/>
-      </p:ext>
-    </p:extLst>
-  </p:cSld>
-  <p:clrMapOvr>
-    <a:masterClrMapping/>
-  </p:clrMapOvr>
-</p:sld>
-</file>
-
-<file path=ppt/slides/slide30.xml><?xml version="1.0" encoding="utf-8"?>
+<file path=ppt/slides/slide31.xml><?xml version="1.0" encoding="utf-8"?>
 <p:sld xmlns:a="http://schemas.openxmlformats.org/drawingml/2006/main" xmlns:r="http://schemas.openxmlformats.org/officeDocument/2006/relationships" xmlns:p="http://schemas.openxmlformats.org/presentationml/2006/main" showMasterPhAnim="0">
   <p:cSld>
     <p:spTree>
@@ -14311,7 +14624,7 @@
 </p:sld>
 </file>
 
-<file path=ppt/slides/slide31.xml><?xml version="1.0" encoding="utf-8"?>
+<file path=ppt/slides/slide32.xml><?xml version="1.0" encoding="utf-8"?>
 <p:sld xmlns:a="http://schemas.openxmlformats.org/drawingml/2006/main" xmlns:r="http://schemas.openxmlformats.org/officeDocument/2006/relationships" xmlns:p="http://schemas.openxmlformats.org/presentationml/2006/main" showMasterPhAnim="0">
   <p:cSld>
     <p:spTree>
@@ -14379,7 +14692,7 @@
             </a:pPr>
             <a:r>
               <a:rPr lang="en-US" sz="2800" dirty="0"/>
-              <a:t>Additivity and linearity</a:t>
+              <a:t>Additivity </a:t>
             </a:r>
           </a:p>
           <a:p>
@@ -14389,27 +14702,21 @@
               </a:lnSpc>
             </a:pPr>
             <a:r>
-              <a:rPr lang="en-GB" sz="2800" dirty="0"/>
-              <a:t>Spherical residuals</a:t>
-            </a:r>
-          </a:p>
-          <a:p>
-            <a:pPr lvl="1">
-              <a:lnSpc>
-                <a:spcPct val="90000"/>
-              </a:lnSpc>
-            </a:pPr>
+              <a:rPr lang="en-US" dirty="0"/>
+              <a:t>L</a:t>
+            </a:r>
+            <a:r>
+              <a:rPr lang="en-US" sz="2800" dirty="0"/>
+              <a:t>inearity</a:t>
+            </a:r>
+          </a:p>
+          <a:p>
             <a:r>
               <a:rPr lang="en-US" dirty="0"/>
               <a:t>Homoscedasticity: For each value of the predictors the variance of the error term should be constant</a:t>
             </a:r>
           </a:p>
           <a:p>
-            <a:pPr lvl="1">
-              <a:lnSpc>
-                <a:spcPct val="90000"/>
-              </a:lnSpc>
-            </a:pPr>
             <a:r>
               <a:rPr lang="en-US" dirty="0"/>
               <a:t>Independent </a:t>
@@ -14422,7 +14729,6 @@
               <a:rPr lang="en-US" dirty="0"/>
               <a:t>: for any pair of observations, the error terms should be uncorrelated.</a:t>
             </a:r>
-            <a:endParaRPr lang="en-US" sz="2400" dirty="0"/>
           </a:p>
         </p:txBody>
       </p:sp>
@@ -14531,15 +14837,33 @@
                                   </p:childTnLst>
                                 </p:cTn>
                               </p:par>
+                            </p:childTnLst>
+                          </p:cTn>
+                        </p:par>
+                      </p:childTnLst>
+                    </p:cTn>
+                  </p:par>
+                  <p:par>
+                    <p:cTn id="11" fill="hold">
+                      <p:stCondLst>
+                        <p:cond delay="indefinite"/>
+                      </p:stCondLst>
+                      <p:childTnLst>
+                        <p:par>
+                          <p:cTn id="12" fill="hold">
+                            <p:stCondLst>
+                              <p:cond delay="0"/>
+                            </p:stCondLst>
+                            <p:childTnLst>
                               <p:par>
-                                <p:cTn id="11" presetID="1" presetClass="entr" presetSubtype="0" fill="hold" grpId="0" nodeType="withEffect">
+                                <p:cTn id="13" presetID="1" presetClass="entr" presetSubtype="0" fill="hold" grpId="0" nodeType="clickEffect">
                                   <p:stCondLst>
                                     <p:cond delay="0"/>
                                   </p:stCondLst>
                                   <p:childTnLst>
                                     <p:set>
                                       <p:cBhvr>
-                                        <p:cTn id="12" dur="1" fill="hold">
+                                        <p:cTn id="14" dur="1" fill="hold">
                                           <p:stCondLst>
                                             <p:cond delay="0"/>
                                           </p:stCondLst>
@@ -14562,15 +14886,33 @@
                                   </p:childTnLst>
                                 </p:cTn>
                               </p:par>
+                            </p:childTnLst>
+                          </p:cTn>
+                        </p:par>
+                      </p:childTnLst>
+                    </p:cTn>
+                  </p:par>
+                  <p:par>
+                    <p:cTn id="15" fill="hold">
+                      <p:stCondLst>
+                        <p:cond delay="indefinite"/>
+                      </p:stCondLst>
+                      <p:childTnLst>
+                        <p:par>
+                          <p:cTn id="16" fill="hold">
+                            <p:stCondLst>
+                              <p:cond delay="0"/>
+                            </p:stCondLst>
+                            <p:childTnLst>
                               <p:par>
-                                <p:cTn id="13" presetID="1" presetClass="entr" presetSubtype="0" fill="hold" grpId="0" nodeType="withEffect">
+                                <p:cTn id="17" presetID="1" presetClass="entr" presetSubtype="0" fill="hold" grpId="0" nodeType="clickEffect">
                                   <p:stCondLst>
                                     <p:cond delay="0"/>
                                   </p:stCondLst>
                                   <p:childTnLst>
                                     <p:set>
                                       <p:cBhvr>
-                                        <p:cTn id="14" dur="1" fill="hold">
+                                        <p:cTn id="18" dur="1" fill="hold">
                                           <p:stCondLst>
                                             <p:cond delay="0"/>
                                           </p:stCondLst>
@@ -14627,7 +14969,7 @@
 </p:sld>
 </file>
 
-<file path=ppt/slides/slide32.xml><?xml version="1.0" encoding="utf-8"?>
+<file path=ppt/slides/slide33.xml><?xml version="1.0" encoding="utf-8"?>
 <p:sld xmlns:a="http://schemas.openxmlformats.org/drawingml/2006/main" xmlns:r="http://schemas.openxmlformats.org/officeDocument/2006/relationships" xmlns:p="http://schemas.openxmlformats.org/presentationml/2006/main" showMasterPhAnim="0">
   <p:cSld>
     <p:spTree>
@@ -14709,7 +15051,7 @@
 </p:sld>
 </file>
 
-<file path=ppt/slides/slide33.xml><?xml version="1.0" encoding="utf-8"?>
+<file path=ppt/slides/slide34.xml><?xml version="1.0" encoding="utf-8"?>
 <p:sld xmlns:a="http://schemas.openxmlformats.org/drawingml/2006/main" xmlns:r="http://schemas.openxmlformats.org/officeDocument/2006/relationships" xmlns:p="http://schemas.openxmlformats.org/presentationml/2006/main" showMasterPhAnim="0">
   <p:cSld>
     <p:spTree>
@@ -15192,7 +15534,7 @@
 </p:sld>
 </file>
 
-<file path=ppt/slides/slide34.xml><?xml version="1.0" encoding="utf-8"?>
+<file path=ppt/slides/slide35.xml><?xml version="1.0" encoding="utf-8"?>
 <p:sld xmlns:a="http://schemas.openxmlformats.org/drawingml/2006/main" xmlns:r="http://schemas.openxmlformats.org/officeDocument/2006/relationships" xmlns:p="http://schemas.openxmlformats.org/presentationml/2006/main" showMasterPhAnim="0">
   <p:cSld>
     <p:spTree>
@@ -15244,7 +15586,7 @@
         <p:spPr/>
         <p:txBody>
           <a:bodyPr>
-            <a:normAutofit/>
+            <a:normAutofit fontScale="92500" lnSpcReduction="20000"/>
           </a:bodyPr>
           <a:lstStyle/>
           <a:p>
@@ -15274,6 +15616,37 @@
             <a:r>
               <a:rPr lang="en-US" sz="2800" dirty="0"/>
               <a:t>variance inflation factor</a:t>
+            </a:r>
+          </a:p>
+          <a:p>
+            <a:pPr lvl="1"/>
+            <a:endParaRPr lang="en-US" sz="2800" dirty="0"/>
+          </a:p>
+          <a:p>
+            <a:r>
+              <a:rPr lang="en-US" sz="3200" dirty="0"/>
+              <a:t>as collinearity increases, be concerned about</a:t>
+            </a:r>
+          </a:p>
+          <a:p>
+            <a:pPr lvl="1"/>
+            <a:r>
+              <a:rPr lang="en-US" sz="2800" dirty="0"/>
+              <a:t>untrustworthy coefficients</a:t>
+            </a:r>
+          </a:p>
+          <a:p>
+            <a:pPr lvl="1"/>
+            <a:r>
+              <a:rPr lang="en-US" sz="2800" dirty="0"/>
+              <a:t>limited power</a:t>
+            </a:r>
+          </a:p>
+          <a:p>
+            <a:pPr lvl="1"/>
+            <a:r>
+              <a:rPr lang="en-US" sz="2800" dirty="0"/>
+              <a:t>importance of one predictor over another</a:t>
             </a:r>
           </a:p>
         </p:txBody>
@@ -15451,6 +15824,148 @@
                       </p:childTnLst>
                     </p:cTn>
                   </p:par>
+                  <p:par>
+                    <p:cTn id="15" fill="hold">
+                      <p:stCondLst>
+                        <p:cond delay="indefinite"/>
+                      </p:stCondLst>
+                      <p:childTnLst>
+                        <p:par>
+                          <p:cTn id="16" fill="hold">
+                            <p:stCondLst>
+                              <p:cond delay="0"/>
+                            </p:stCondLst>
+                            <p:childTnLst>
+                              <p:par>
+                                <p:cTn id="17" presetID="1" presetClass="entr" presetSubtype="0" fill="hold" grpId="0" nodeType="clickEffect">
+                                  <p:stCondLst>
+                                    <p:cond delay="0"/>
+                                  </p:stCondLst>
+                                  <p:childTnLst>
+                                    <p:set>
+                                      <p:cBhvr>
+                                        <p:cTn id="18" dur="1" fill="hold">
+                                          <p:stCondLst>
+                                            <p:cond delay="0"/>
+                                          </p:stCondLst>
+                                        </p:cTn>
+                                        <p:tgtEl>
+                                          <p:spTgt spid="288771">
+                                            <p:txEl>
+                                              <p:pRg st="6" end="6"/>
+                                            </p:txEl>
+                                          </p:spTgt>
+                                        </p:tgtEl>
+                                        <p:attrNameLst>
+                                          <p:attrName>style.visibility</p:attrName>
+                                        </p:attrNameLst>
+                                      </p:cBhvr>
+                                      <p:to>
+                                        <p:strVal val="visible"/>
+                                      </p:to>
+                                    </p:set>
+                                  </p:childTnLst>
+                                </p:cTn>
+                              </p:par>
+                              <p:par>
+                                <p:cTn id="19" presetID="1" presetClass="entr" presetSubtype="0" fill="hold" grpId="0" nodeType="withEffect">
+                                  <p:stCondLst>
+                                    <p:cond delay="0"/>
+                                  </p:stCondLst>
+                                  <p:childTnLst>
+                                    <p:set>
+                                      <p:cBhvr>
+                                        <p:cTn id="20" dur="1" fill="hold">
+                                          <p:stCondLst>
+                                            <p:cond delay="0"/>
+                                          </p:stCondLst>
+                                        </p:cTn>
+                                        <p:tgtEl>
+                                          <p:spTgt spid="288771">
+                                            <p:txEl>
+                                              <p:pRg st="7" end="7"/>
+                                            </p:txEl>
+                                          </p:spTgt>
+                                        </p:tgtEl>
+                                        <p:attrNameLst>
+                                          <p:attrName>style.visibility</p:attrName>
+                                        </p:attrNameLst>
+                                      </p:cBhvr>
+                                      <p:to>
+                                        <p:strVal val="visible"/>
+                                      </p:to>
+                                    </p:set>
+                                  </p:childTnLst>
+                                </p:cTn>
+                              </p:par>
+                              <p:par>
+                                <p:cTn id="21" presetID="1" presetClass="entr" presetSubtype="0" fill="hold" grpId="0" nodeType="withEffect">
+                                  <p:stCondLst>
+                                    <p:cond delay="0"/>
+                                  </p:stCondLst>
+                                  <p:childTnLst>
+                                    <p:set>
+                                      <p:cBhvr>
+                                        <p:cTn id="22" dur="1" fill="hold">
+                                          <p:stCondLst>
+                                            <p:cond delay="0"/>
+                                          </p:stCondLst>
+                                        </p:cTn>
+                                        <p:tgtEl>
+                                          <p:spTgt spid="288771">
+                                            <p:txEl>
+                                              <p:pRg st="8" end="8"/>
+                                            </p:txEl>
+                                          </p:spTgt>
+                                        </p:tgtEl>
+                                        <p:attrNameLst>
+                                          <p:attrName>style.visibility</p:attrName>
+                                        </p:attrNameLst>
+                                      </p:cBhvr>
+                                      <p:to>
+                                        <p:strVal val="visible"/>
+                                      </p:to>
+                                    </p:set>
+                                  </p:childTnLst>
+                                </p:cTn>
+                              </p:par>
+                              <p:par>
+                                <p:cTn id="23" presetID="1" presetClass="entr" presetSubtype="0" fill="hold" grpId="0" nodeType="withEffect">
+                                  <p:stCondLst>
+                                    <p:cond delay="0"/>
+                                  </p:stCondLst>
+                                  <p:childTnLst>
+                                    <p:set>
+                                      <p:cBhvr>
+                                        <p:cTn id="24" dur="1" fill="hold">
+                                          <p:stCondLst>
+                                            <p:cond delay="0"/>
+                                          </p:stCondLst>
+                                        </p:cTn>
+                                        <p:tgtEl>
+                                          <p:spTgt spid="288771">
+                                            <p:txEl>
+                                              <p:pRg st="9" end="9"/>
+                                            </p:txEl>
+                                          </p:spTgt>
+                                        </p:tgtEl>
+                                        <p:attrNameLst>
+                                          <p:attrName>style.visibility</p:attrName>
+                                        </p:attrNameLst>
+                                      </p:cBhvr>
+                                      <p:to>
+                                        <p:strVal val="visible"/>
+                                      </p:to>
+                                    </p:set>
+                                  </p:childTnLst>
+                                </p:cTn>
+                              </p:par>
+                            </p:childTnLst>
+                          </p:cTn>
+                        </p:par>
+                      </p:childTnLst>
+                    </p:cTn>
+                  </p:par>
                 </p:childTnLst>
               </p:cTn>
               <p:prevCondLst>
@@ -15479,7 +15994,7 @@
 </p:sld>
 </file>
 
-<file path=ppt/slides/slide35.xml><?xml version="1.0" encoding="utf-8"?>
+<file path=ppt/slides/slide36.xml><?xml version="1.0" encoding="utf-8"?>
 <p:sld xmlns:a="http://schemas.openxmlformats.org/drawingml/2006/main" xmlns:r="http://schemas.openxmlformats.org/officeDocument/2006/relationships" xmlns:p="http://schemas.openxmlformats.org/presentationml/2006/main" showMasterPhAnim="0">
   <p:cSld>
     <p:spTree>
@@ -15787,7 +16302,7 @@
 </p:sld>
 </file>
 
-<file path=ppt/slides/slide36.xml><?xml version="1.0" encoding="utf-8"?>
+<file path=ppt/slides/slide37.xml><?xml version="1.0" encoding="utf-8"?>
 <p:sld xmlns:a="http://schemas.openxmlformats.org/drawingml/2006/main" xmlns:r="http://schemas.openxmlformats.org/officeDocument/2006/relationships" xmlns:p="http://schemas.openxmlformats.org/presentationml/2006/main">
   <p:cSld>
     <p:spTree>
@@ -16057,7 +16572,7 @@
 </p:sld>
 </file>
 
-<file path=ppt/slides/slide37.xml><?xml version="1.0" encoding="utf-8"?>
+<file path=ppt/slides/slide38.xml><?xml version="1.0" encoding="utf-8"?>
 <p:sld xmlns:a="http://schemas.openxmlformats.org/drawingml/2006/main" xmlns:r="http://schemas.openxmlformats.org/officeDocument/2006/relationships" xmlns:p="http://schemas.openxmlformats.org/presentationml/2006/main" showMasterPhAnim="0">
   <p:cSld>
     <p:spTree>
@@ -16445,7 +16960,7 @@
 </p:sld>
 </file>
 
-<file path=ppt/slides/slide38.xml><?xml version="1.0" encoding="utf-8"?>
+<file path=ppt/slides/slide39.xml><?xml version="1.0" encoding="utf-8"?>
 <p:sld xmlns:a="http://schemas.openxmlformats.org/drawingml/2006/main" xmlns:r="http://schemas.openxmlformats.org/officeDocument/2006/relationships" xmlns:p="http://schemas.openxmlformats.org/presentationml/2006/main">
   <p:cSld>
     <p:spTree>
@@ -16865,7 +17380,7 @@
 </p:sld>
 </file>
 
-<file path=ppt/slides/slide39.xml><?xml version="1.0" encoding="utf-8"?>
+<file path=ppt/slides/slide4.xml><?xml version="1.0" encoding="utf-8"?>
 <p:sld xmlns:a="http://schemas.openxmlformats.org/drawingml/2006/main" xmlns:r="http://schemas.openxmlformats.org/officeDocument/2006/relationships" xmlns:p="http://schemas.openxmlformats.org/presentationml/2006/main">
   <p:cSld>
     <p:spTree>
@@ -16887,6 +17402,241 @@
           <p:cNvPr id="2" name="Title 1">
             <a:extLst>
               <a:ext uri="{FF2B5EF4-FFF2-40B4-BE49-F238E27FC236}">
+                <a16:creationId xmlns:a16="http://schemas.microsoft.com/office/drawing/2014/main" id="{CC91C766-667F-6548-9059-FC038E747AE7}"/>
+              </a:ext>
+            </a:extLst>
+          </p:cNvPr>
+          <p:cNvSpPr>
+            <a:spLocks noGrp="1"/>
+          </p:cNvSpPr>
+          <p:nvPr>
+            <p:ph type="title"/>
+          </p:nvPr>
+        </p:nvSpPr>
+        <p:spPr/>
+        <p:txBody>
+          <a:bodyPr/>
+          <a:lstStyle/>
+          <a:p>
+            <a:r>
+              <a:rPr lang="en-US" dirty="0"/>
+              <a:t>Do you remember…?</a:t>
+            </a:r>
+          </a:p>
+        </p:txBody>
+      </p:sp>
+      <p:pic>
+        <p:nvPicPr>
+          <p:cNvPr id="4" name="Picture 3">
+            <a:extLst>
+              <a:ext uri="{FF2B5EF4-FFF2-40B4-BE49-F238E27FC236}">
+                <a16:creationId xmlns:a16="http://schemas.microsoft.com/office/drawing/2014/main" id="{DE7CF31B-9DEC-4644-8235-59E139659C22}"/>
+              </a:ext>
+            </a:extLst>
+          </p:cNvPr>
+          <p:cNvPicPr>
+            <a:picLocks noChangeAspect="1"/>
+          </p:cNvPicPr>
+          <p:nvPr/>
+        </p:nvPicPr>
+        <p:blipFill>
+          <a:blip r:embed="rId2"/>
+          <a:stretch>
+            <a:fillRect/>
+          </a:stretch>
+        </p:blipFill>
+        <p:spPr>
+          <a:xfrm>
+            <a:off x="2876549" y="1927478"/>
+            <a:ext cx="6071507" cy="4565397"/>
+          </a:xfrm>
+          <a:prstGeom prst="rect">
+            <a:avLst/>
+          </a:prstGeom>
+        </p:spPr>
+      </p:pic>
+      <p:sp>
+        <p:nvSpPr>
+          <p:cNvPr id="5" name="Rectangle 4">
+            <a:extLst>
+              <a:ext uri="{FF2B5EF4-FFF2-40B4-BE49-F238E27FC236}">
+                <a16:creationId xmlns:a16="http://schemas.microsoft.com/office/drawing/2014/main" id="{2AF80B6B-B6EF-844D-B50C-7B597F7213DC}"/>
+              </a:ext>
+            </a:extLst>
+          </p:cNvPr>
+          <p:cNvSpPr/>
+          <p:nvPr/>
+        </p:nvSpPr>
+        <p:spPr>
+          <a:xfrm>
+            <a:off x="1959429" y="4036303"/>
+            <a:ext cx="8229600" cy="2642084"/>
+          </a:xfrm>
+          <a:prstGeom prst="rect">
+            <a:avLst/>
+          </a:prstGeom>
+          <a:solidFill>
+            <a:schemeClr val="bg1"/>
+          </a:solidFill>
+          <a:ln>
+            <a:noFill/>
+          </a:ln>
+        </p:spPr>
+        <p:style>
+          <a:lnRef idx="2">
+            <a:schemeClr val="accent1">
+              <a:shade val="50000"/>
+            </a:schemeClr>
+          </a:lnRef>
+          <a:fillRef idx="1">
+            <a:schemeClr val="accent1"/>
+          </a:fillRef>
+          <a:effectRef idx="0">
+            <a:schemeClr val="accent1"/>
+          </a:effectRef>
+          <a:fontRef idx="minor">
+            <a:schemeClr val="lt1"/>
+          </a:fontRef>
+        </p:style>
+        <p:txBody>
+          <a:bodyPr rtlCol="0" anchor="ctr"/>
+          <a:lstStyle/>
+          <a:p>
+            <a:pPr algn="ctr"/>
+            <a:endParaRPr lang="en-US" dirty="0">
+              <a:solidFill>
+                <a:schemeClr val="bg1"/>
+              </a:solidFill>
+            </a:endParaRPr>
+          </a:p>
+        </p:txBody>
+      </p:sp>
+      <p:sp>
+        <p:nvSpPr>
+          <p:cNvPr id="6" name="Rectangle 5">
+            <a:extLst>
+              <a:ext uri="{FF2B5EF4-FFF2-40B4-BE49-F238E27FC236}">
+                <a16:creationId xmlns:a16="http://schemas.microsoft.com/office/drawing/2014/main" id="{D62302A2-F633-6B42-9C38-37DC221465EF}"/>
+              </a:ext>
+            </a:extLst>
+          </p:cNvPr>
+          <p:cNvSpPr/>
+          <p:nvPr/>
+        </p:nvSpPr>
+        <p:spPr>
+          <a:xfrm>
+            <a:off x="2349306" y="1927478"/>
+            <a:ext cx="7638756" cy="894220"/>
+          </a:xfrm>
+          <a:prstGeom prst="rect">
+            <a:avLst/>
+          </a:prstGeom>
+          <a:solidFill>
+            <a:schemeClr val="bg1"/>
+          </a:solidFill>
+          <a:ln>
+            <a:noFill/>
+          </a:ln>
+        </p:spPr>
+        <p:style>
+          <a:lnRef idx="2">
+            <a:schemeClr val="accent1">
+              <a:shade val="50000"/>
+            </a:schemeClr>
+          </a:lnRef>
+          <a:fillRef idx="1">
+            <a:schemeClr val="accent1"/>
+          </a:fillRef>
+          <a:effectRef idx="0">
+            <a:schemeClr val="accent1"/>
+          </a:effectRef>
+          <a:fontRef idx="minor">
+            <a:schemeClr val="lt1"/>
+          </a:fontRef>
+        </p:style>
+        <p:txBody>
+          <a:bodyPr rtlCol="0" anchor="ctr"/>
+          <a:lstStyle/>
+          <a:p>
+            <a:pPr algn="ctr"/>
+            <a:endParaRPr lang="en-US">
+              <a:solidFill>
+                <a:schemeClr val="bg1"/>
+              </a:solidFill>
+            </a:endParaRPr>
+          </a:p>
+        </p:txBody>
+      </p:sp>
+      <p:sp>
+        <p:nvSpPr>
+          <p:cNvPr id="3" name="TextBox 2">
+            <a:extLst>
+              <a:ext uri="{FF2B5EF4-FFF2-40B4-BE49-F238E27FC236}">
+                <a16:creationId xmlns:a16="http://schemas.microsoft.com/office/drawing/2014/main" id="{A03F7B4C-AE99-5D7D-3484-DE5414D670F5}"/>
+              </a:ext>
+            </a:extLst>
+          </p:cNvPr>
+          <p:cNvSpPr txBox="1"/>
+          <p:nvPr/>
+        </p:nvSpPr>
+        <p:spPr>
+          <a:xfrm>
+            <a:off x="4140342" y="5167313"/>
+            <a:ext cx="3543919" cy="461665"/>
+          </a:xfrm>
+          <a:prstGeom prst="rect">
+            <a:avLst/>
+          </a:prstGeom>
+          <a:noFill/>
+        </p:spPr>
+        <p:txBody>
+          <a:bodyPr wrap="none" rtlCol="0">
+            <a:spAutoFit/>
+          </a:bodyPr>
+          <a:lstStyle/>
+          <a:p>
+            <a:r>
+              <a:rPr lang="en-US" sz="2400" dirty="0"/>
+              <a:t>Thank your math teachers!</a:t>
+            </a:r>
+          </a:p>
+        </p:txBody>
+      </p:sp>
+    </p:spTree>
+    <p:extLst>
+      <p:ext uri="{BB962C8B-B14F-4D97-AF65-F5344CB8AC3E}">
+        <p14:creationId xmlns:p14="http://schemas.microsoft.com/office/powerpoint/2010/main" val="2008238407"/>
+      </p:ext>
+    </p:extLst>
+  </p:cSld>
+  <p:clrMapOvr>
+    <a:masterClrMapping/>
+  </p:clrMapOvr>
+</p:sld>
+</file>
+
+<file path=ppt/slides/slide40.xml><?xml version="1.0" encoding="utf-8"?>
+<p:sld xmlns:a="http://schemas.openxmlformats.org/drawingml/2006/main" xmlns:r="http://schemas.openxmlformats.org/officeDocument/2006/relationships" xmlns:p="http://schemas.openxmlformats.org/presentationml/2006/main">
+  <p:cSld>
+    <p:spTree>
+      <p:nvGrpSpPr>
+        <p:cNvPr id="1" name=""/>
+        <p:cNvGrpSpPr/>
+        <p:nvPr/>
+      </p:nvGrpSpPr>
+      <p:grpSpPr>
+        <a:xfrm>
+          <a:off x="0" y="0"/>
+          <a:ext cx="0" cy="0"/>
+          <a:chOff x="0" y="0"/>
+          <a:chExt cx="0" cy="0"/>
+        </a:xfrm>
+      </p:grpSpPr>
+      <p:sp>
+        <p:nvSpPr>
+          <p:cNvPr id="2" name="Title 1">
+            <a:extLst>
+              <a:ext uri="{FF2B5EF4-FFF2-40B4-BE49-F238E27FC236}">
                 <a16:creationId xmlns:a16="http://schemas.microsoft.com/office/drawing/2014/main" id="{B515600C-6602-654B-C8D9-CED05807189B}"/>
               </a:ext>
             </a:extLst>
@@ -16963,7 +17713,7 @@
 </p:sld>
 </file>
 
-<file path=ppt/slides/slide4.xml><?xml version="1.0" encoding="utf-8"?>
+<file path=ppt/slides/slide5.xml><?xml version="1.0" encoding="utf-8"?>
 <p:sld xmlns:a="http://schemas.openxmlformats.org/drawingml/2006/main" xmlns:r="http://schemas.openxmlformats.org/officeDocument/2006/relationships" xmlns:p="http://schemas.openxmlformats.org/presentationml/2006/main">
   <p:cSld>
     <p:spTree>
@@ -17107,7 +17857,7 @@
 </p:sld>
 </file>
 
-<file path=ppt/slides/slide5.xml><?xml version="1.0" encoding="utf-8"?>
+<file path=ppt/slides/slide6.xml><?xml version="1.0" encoding="utf-8"?>
 <p:sld xmlns:a="http://schemas.openxmlformats.org/drawingml/2006/main" xmlns:r="http://schemas.openxmlformats.org/officeDocument/2006/relationships" xmlns:p="http://schemas.openxmlformats.org/presentationml/2006/main">
   <p:cSld>
     <p:spTree>
@@ -17429,7 +18179,7 @@
 </p:sld>
 </file>
 
-<file path=ppt/slides/slide6.xml><?xml version="1.0" encoding="utf-8"?>
+<file path=ppt/slides/slide7.xml><?xml version="1.0" encoding="utf-8"?>
 <p:sld xmlns:a="http://schemas.openxmlformats.org/drawingml/2006/main" xmlns:r="http://schemas.openxmlformats.org/officeDocument/2006/relationships" xmlns:p="http://schemas.openxmlformats.org/presentationml/2006/main">
   <p:cSld>
     <p:spTree>
@@ -18364,7 +19114,7 @@
 </p:sld>
 </file>
 
-<file path=ppt/slides/slide7.xml><?xml version="1.0" encoding="utf-8"?>
+<file path=ppt/slides/slide8.xml><?xml version="1.0" encoding="utf-8"?>
 <p:sld xmlns:a="http://schemas.openxmlformats.org/drawingml/2006/main" xmlns:r="http://schemas.openxmlformats.org/officeDocument/2006/relationships" xmlns:p="http://schemas.openxmlformats.org/presentationml/2006/main">
   <p:cSld>
     <p:spTree>
@@ -18441,7 +19191,7 @@
 </p:sld>
 </file>
 
-<file path=ppt/slides/slide8.xml><?xml version="1.0" encoding="utf-8"?>
+<file path=ppt/slides/slide9.xml><?xml version="1.0" encoding="utf-8"?>
 <p:sld xmlns:a="http://schemas.openxmlformats.org/drawingml/2006/main" xmlns:r="http://schemas.openxmlformats.org/officeDocument/2006/relationships" xmlns:p="http://schemas.openxmlformats.org/presentationml/2006/main">
   <p:cSld>
     <p:spTree>
@@ -18507,447 +19257,6 @@
           </a:prstGeom>
         </p:spPr>
       </p:pic>
-    </p:spTree>
-  </p:cSld>
-  <p:clrMapOvr>
-    <a:masterClrMapping/>
-  </p:clrMapOvr>
-</p:sld>
-</file>
-
-<file path=ppt/slides/slide9.xml><?xml version="1.0" encoding="utf-8"?>
-<p:sld xmlns:a="http://schemas.openxmlformats.org/drawingml/2006/main" xmlns:r="http://schemas.openxmlformats.org/officeDocument/2006/relationships" xmlns:p="http://schemas.openxmlformats.org/presentationml/2006/main" showMasterPhAnim="0">
-  <p:cSld>
-    <p:spTree>
-      <p:nvGrpSpPr>
-        <p:cNvPr id="1" name=""/>
-        <p:cNvGrpSpPr/>
-        <p:nvPr/>
-      </p:nvGrpSpPr>
-      <p:grpSpPr>
-        <a:xfrm>
-          <a:off x="0" y="0"/>
-          <a:ext cx="0" cy="0"/>
-          <a:chOff x="0" y="0"/>
-          <a:chExt cx="0" cy="0"/>
-        </a:xfrm>
-      </p:grpSpPr>
-      <p:sp>
-        <p:nvSpPr>
-          <p:cNvPr id="217090" name="Rectangle 2"/>
-          <p:cNvSpPr>
-            <a:spLocks noGrp="1" noChangeArrowheads="1"/>
-          </p:cNvSpPr>
-          <p:nvPr>
-            <p:ph type="title"/>
-          </p:nvPr>
-        </p:nvSpPr>
-        <p:spPr>
-          <a:xfrm>
-            <a:off x="551543" y="228600"/>
-            <a:ext cx="10972800" cy="1143000"/>
-          </a:xfrm>
-        </p:spPr>
-        <p:txBody>
-          <a:bodyPr>
-            <a:normAutofit/>
-          </a:bodyPr>
-          <a:lstStyle/>
-          <a:p>
-            <a:r>
-              <a:rPr lang="en-GB" dirty="0"/>
-              <a:t>The Model as an Equation</a:t>
-            </a:r>
-          </a:p>
-        </p:txBody>
-      </p:sp>
-      <p:sp>
-        <p:nvSpPr>
-          <p:cNvPr id="217091" name="Rectangle 3"/>
-          <p:cNvSpPr>
-            <a:spLocks noGrp="1" noChangeArrowheads="1"/>
-          </p:cNvSpPr>
-          <p:nvPr>
-            <p:ph type="body" idx="1"/>
-          </p:nvPr>
-        </p:nvSpPr>
-        <p:spPr>
-          <a:xfrm>
-            <a:off x="961570" y="1601108"/>
-            <a:ext cx="9909629" cy="2840264"/>
-          </a:xfrm>
-        </p:spPr>
-        <p:txBody>
-          <a:bodyPr/>
-          <a:lstStyle/>
-          <a:p>
-            <a:pPr>
-              <a:lnSpc>
-                <a:spcPct val="90000"/>
-              </a:lnSpc>
-            </a:pPr>
-            <a:r>
-              <a:rPr lang="en-GB" sz="4000" dirty="0"/>
-              <a:t>With several predictors the model is described using a variation of the equation of a straight line.</a:t>
-            </a:r>
-          </a:p>
-        </p:txBody>
-      </p:sp>
-      <mc:AlternateContent xmlns:mc="http://schemas.openxmlformats.org/markup-compatibility/2006" xmlns:a14="http://schemas.microsoft.com/office/drawing/2010/main">
-        <mc:Choice Requires="a14">
-          <p:sp>
-            <p:nvSpPr>
-              <p:cNvPr id="3" name="Rectangle 2"/>
-              <p:cNvSpPr/>
-              <p:nvPr/>
-            </p:nvSpPr>
-            <p:spPr>
-              <a:xfrm>
-                <a:off x="1753401" y="4148984"/>
-                <a:ext cx="7849841" cy="584775"/>
-              </a:xfrm>
-              <a:prstGeom prst="rect">
-                <a:avLst/>
-              </a:prstGeom>
-            </p:spPr>
-            <p:txBody>
-              <a:bodyPr wrap="none">
-                <a:spAutoFit/>
-              </a:bodyPr>
-              <a:lstStyle/>
-              <a:p>
-                <a:pPr/>
-                <a14:m>
-                  <m:oMathPara xmlns:m="http://schemas.openxmlformats.org/officeDocument/2006/math">
-                    <m:oMathParaPr>
-                      <m:jc m:val="centerGroup"/>
-                    </m:oMathParaPr>
-                    <m:oMath xmlns:m="http://schemas.openxmlformats.org/officeDocument/2006/math">
-                      <m:sSub>
-                        <m:sSubPr>
-                          <m:ctrlPr>
-                            <a:rPr lang="en-GB" sz="3200" i="1">
-                              <a:latin typeface="Cambria Math" panose="02040503050406030204" pitchFamily="18" charset="0"/>
-                            </a:rPr>
-                          </m:ctrlPr>
-                        </m:sSubPr>
-                        <m:e>
-                          <m:r>
-                            <a:rPr lang="en-GB" sz="3200" i="1">
-                              <a:latin typeface="Cambria Math" charset="0"/>
-                            </a:rPr>
-                            <m:t>𝑌</m:t>
-                          </m:r>
-                        </m:e>
-                        <m:sub>
-                          <m:r>
-                            <a:rPr lang="en-GB" sz="3200" i="1">
-                              <a:latin typeface="Cambria Math" charset="0"/>
-                            </a:rPr>
-                            <m:t>𝑖</m:t>
-                          </m:r>
-                        </m:sub>
-                      </m:sSub>
-                      <m:r>
-                        <a:rPr lang="en-GB" sz="3200">
-                          <a:latin typeface="Cambria Math" charset="0"/>
-                        </a:rPr>
-                        <m:t>=</m:t>
-                      </m:r>
-                      <m:d>
-                        <m:dPr>
-                          <m:ctrlPr>
-                            <a:rPr lang="en-GB" sz="3200" i="1">
-                              <a:latin typeface="Cambria Math" panose="02040503050406030204" pitchFamily="18" charset="0"/>
-                            </a:rPr>
-                          </m:ctrlPr>
-                        </m:dPr>
-                        <m:e>
-                          <m:sSub>
-                            <m:sSubPr>
-                              <m:ctrlPr>
-                                <a:rPr lang="en-GB" sz="3200" i="1">
-                                  <a:latin typeface="Cambria Math" panose="02040503050406030204" pitchFamily="18" charset="0"/>
-                                </a:rPr>
-                              </m:ctrlPr>
-                            </m:sSubPr>
-                            <m:e>
-                              <m:r>
-                                <a:rPr lang="en-GB" sz="3200" i="1">
-                                  <a:latin typeface="Cambria Math" charset="0"/>
-                                </a:rPr>
-                                <m:t>𝑏</m:t>
-                              </m:r>
-                            </m:e>
-                            <m:sub>
-                              <m:r>
-                                <a:rPr lang="en-GB" sz="3200">
-                                  <a:latin typeface="Cambria Math" charset="0"/>
-                                </a:rPr>
-                                <m:t>0</m:t>
-                              </m:r>
-                            </m:sub>
-                          </m:sSub>
-                          <m:r>
-                            <a:rPr lang="en-GB" sz="3200">
-                              <a:latin typeface="Cambria Math" charset="0"/>
-                            </a:rPr>
-                            <m:t>+</m:t>
-                          </m:r>
-                          <m:sSub>
-                            <m:sSubPr>
-                              <m:ctrlPr>
-                                <a:rPr lang="en-GB" sz="3200" i="1">
-                                  <a:latin typeface="Cambria Math" panose="02040503050406030204" pitchFamily="18" charset="0"/>
-                                </a:rPr>
-                              </m:ctrlPr>
-                            </m:sSubPr>
-                            <m:e>
-                              <m:r>
-                                <a:rPr lang="en-GB" sz="3200" i="1">
-                                  <a:latin typeface="Cambria Math" charset="0"/>
-                                </a:rPr>
-                                <m:t>𝑏</m:t>
-                              </m:r>
-                            </m:e>
-                            <m:sub>
-                              <m:r>
-                                <a:rPr lang="en-GB" sz="3200">
-                                  <a:latin typeface="Cambria Math" charset="0"/>
-                                </a:rPr>
-                                <m:t>1</m:t>
-                              </m:r>
-                            </m:sub>
-                          </m:sSub>
-                          <m:sSub>
-                            <m:sSubPr>
-                              <m:ctrlPr>
-                                <a:rPr lang="en-GB" sz="3200" i="1">
-                                  <a:latin typeface="Cambria Math" panose="02040503050406030204" pitchFamily="18" charset="0"/>
-                                </a:rPr>
-                              </m:ctrlPr>
-                            </m:sSubPr>
-                            <m:e>
-                              <m:r>
-                                <a:rPr lang="en-GB" sz="3200" i="1">
-                                  <a:latin typeface="Cambria Math" charset="0"/>
-                                </a:rPr>
-                                <m:t>𝑋</m:t>
-                              </m:r>
-                            </m:e>
-                            <m:sub>
-                              <m:r>
-                                <a:rPr lang="en-GB" sz="3200">
-                                  <a:latin typeface="Cambria Math" charset="0"/>
-                                </a:rPr>
-                                <m:t>1</m:t>
-                              </m:r>
-                              <m:r>
-                                <a:rPr lang="en-GB" sz="3200" i="1">
-                                  <a:latin typeface="Cambria Math" charset="0"/>
-                                </a:rPr>
-                                <m:t>𝑖</m:t>
-                              </m:r>
-                            </m:sub>
-                          </m:sSub>
-                          <m:r>
-                            <a:rPr lang="en-GB" sz="3200">
-                              <a:latin typeface="Cambria Math" charset="0"/>
-                            </a:rPr>
-                            <m:t>+</m:t>
-                          </m:r>
-                          <m:sSub>
-                            <m:sSubPr>
-                              <m:ctrlPr>
-                                <a:rPr lang="en-GB" sz="3200" i="1">
-                                  <a:latin typeface="Cambria Math" panose="02040503050406030204" pitchFamily="18" charset="0"/>
-                                </a:rPr>
-                              </m:ctrlPr>
-                            </m:sSubPr>
-                            <m:e>
-                              <m:r>
-                                <a:rPr lang="en-GB" sz="3200" i="1">
-                                  <a:latin typeface="Cambria Math" charset="0"/>
-                                </a:rPr>
-                                <m:t>𝑏</m:t>
-                              </m:r>
-                            </m:e>
-                            <m:sub>
-                              <m:r>
-                                <a:rPr lang="en-GB" sz="3200">
-                                  <a:latin typeface="Cambria Math" charset="0"/>
-                                </a:rPr>
-                                <m:t>2</m:t>
-                              </m:r>
-                            </m:sub>
-                          </m:sSub>
-                          <m:sSub>
-                            <m:sSubPr>
-                              <m:ctrlPr>
-                                <a:rPr lang="en-GB" sz="3200" i="1">
-                                  <a:latin typeface="Cambria Math" panose="02040503050406030204" pitchFamily="18" charset="0"/>
-                                </a:rPr>
-                              </m:ctrlPr>
-                            </m:sSubPr>
-                            <m:e>
-                              <m:r>
-                                <a:rPr lang="en-GB" sz="3200" i="1">
-                                  <a:latin typeface="Cambria Math" charset="0"/>
-                                </a:rPr>
-                                <m:t>𝑋</m:t>
-                              </m:r>
-                            </m:e>
-                            <m:sub>
-                              <m:r>
-                                <a:rPr lang="en-GB" sz="3200">
-                                  <a:latin typeface="Cambria Math" charset="0"/>
-                                </a:rPr>
-                                <m:t>2</m:t>
-                              </m:r>
-                              <m:r>
-                                <a:rPr lang="en-GB" sz="3200" i="1">
-                                  <a:latin typeface="Cambria Math" charset="0"/>
-                                </a:rPr>
-                                <m:t>𝑖</m:t>
-                              </m:r>
-                            </m:sub>
-                          </m:sSub>
-                          <m:r>
-                            <a:rPr lang="en-GB" sz="3200">
-                              <a:latin typeface="Cambria Math" charset="0"/>
-                            </a:rPr>
-                            <m:t>+⋯+</m:t>
-                          </m:r>
-                          <m:sSub>
-                            <m:sSubPr>
-                              <m:ctrlPr>
-                                <a:rPr lang="en-GB" sz="3200" i="1">
-                                  <a:latin typeface="Cambria Math" panose="02040503050406030204" pitchFamily="18" charset="0"/>
-                                </a:rPr>
-                              </m:ctrlPr>
-                            </m:sSubPr>
-                            <m:e>
-                              <m:r>
-                                <a:rPr lang="en-GB" sz="3200" i="1">
-                                  <a:latin typeface="Cambria Math" charset="0"/>
-                                </a:rPr>
-                                <m:t>𝑏</m:t>
-                              </m:r>
-                            </m:e>
-                            <m:sub>
-                              <m:r>
-                                <a:rPr lang="en-GB" sz="3200" i="1">
-                                  <a:latin typeface="Cambria Math" charset="0"/>
-                                </a:rPr>
-                                <m:t>𝑛</m:t>
-                              </m:r>
-                            </m:sub>
-                          </m:sSub>
-                          <m:sSub>
-                            <m:sSubPr>
-                              <m:ctrlPr>
-                                <a:rPr lang="en-GB" sz="3200" i="1">
-                                  <a:latin typeface="Cambria Math" panose="02040503050406030204" pitchFamily="18" charset="0"/>
-                                </a:rPr>
-                              </m:ctrlPr>
-                            </m:sSubPr>
-                            <m:e>
-                              <m:r>
-                                <a:rPr lang="en-GB" sz="3200" i="1">
-                                  <a:latin typeface="Cambria Math" charset="0"/>
-                                </a:rPr>
-                                <m:t>𝑋</m:t>
-                              </m:r>
-                            </m:e>
-                            <m:sub>
-                              <m:r>
-                                <a:rPr lang="en-GB" sz="3200" i="1">
-                                  <a:latin typeface="Cambria Math" charset="0"/>
-                                </a:rPr>
-                                <m:t>𝑛𝑖</m:t>
-                              </m:r>
-                            </m:sub>
-                          </m:sSub>
-                        </m:e>
-                      </m:d>
-                      <m:r>
-                        <a:rPr lang="en-GB" sz="3200">
-                          <a:latin typeface="Cambria Math" charset="0"/>
-                        </a:rPr>
-                        <m:t>+</m:t>
-                      </m:r>
-                      <m:sSub>
-                        <m:sSubPr>
-                          <m:ctrlPr>
-                            <a:rPr lang="en-GB" sz="3200" i="1">
-                              <a:latin typeface="Cambria Math" panose="02040503050406030204" pitchFamily="18" charset="0"/>
-                            </a:rPr>
-                          </m:ctrlPr>
-                        </m:sSubPr>
-                        <m:e>
-                          <m:r>
-                            <a:rPr lang="en-GB" sz="3200" i="1">
-                              <a:latin typeface="Cambria Math" charset="0"/>
-                            </a:rPr>
-                            <m:t>𝜀</m:t>
-                          </m:r>
-                        </m:e>
-                        <m:sub>
-                          <m:r>
-                            <a:rPr lang="en-GB" sz="3200" i="1">
-                              <a:latin typeface="Cambria Math" charset="0"/>
-                            </a:rPr>
-                            <m:t>𝑖</m:t>
-                          </m:r>
-                        </m:sub>
-                      </m:sSub>
-                    </m:oMath>
-                  </m:oMathPara>
-                </a14:m>
-                <a:endParaRPr lang="en-GB" sz="3200" dirty="0"/>
-              </a:p>
-            </p:txBody>
-          </p:sp>
-        </mc:Choice>
-        <mc:Fallback xmlns="">
-          <p:sp>
-            <p:nvSpPr>
-              <p:cNvPr id="3" name="Rectangle 2"/>
-              <p:cNvSpPr>
-                <a:spLocks noRot="1" noChangeAspect="1" noMove="1" noResize="1" noEditPoints="1" noAdjustHandles="1" noChangeArrowheads="1" noChangeShapeType="1" noTextEdit="1"/>
-              </p:cNvSpPr>
-              <p:nvPr/>
-            </p:nvSpPr>
-            <p:spPr>
-              <a:xfrm>
-                <a:off x="1753401" y="4148984"/>
-                <a:ext cx="7849841" cy="584775"/>
-              </a:xfrm>
-              <a:prstGeom prst="rect">
-                <a:avLst/>
-              </a:prstGeom>
-              <a:blipFill>
-                <a:blip r:embed="rId3"/>
-                <a:stretch>
-                  <a:fillRect b="-8511"/>
-                </a:stretch>
-              </a:blipFill>
-            </p:spPr>
-            <p:txBody>
-              <a:bodyPr/>
-              <a:lstStyle/>
-              <a:p>
-                <a:r>
-                  <a:rPr lang="en-US">
-                    <a:noFill/>
-                  </a:rPr>
-                  <a:t> </a:t>
-                </a:r>
-              </a:p>
-            </p:txBody>
-          </p:sp>
-        </mc:Fallback>
-      </mc:AlternateContent>
     </p:spTree>
   </p:cSld>
   <p:clrMapOvr>

--- a/lecture-slides_upload/lecture/06_Statistical Methods_Making Predictions.pptx
+++ b/lecture-slides_upload/lecture/06_Statistical Methods_Making Predictions.pptx
@@ -5,7 +5,7 @@
     <p:sldMasterId id="2147483648" r:id="rId1"/>
   </p:sldMasterIdLst>
   <p:notesMasterIdLst>
-    <p:notesMasterId r:id="rId42"/>
+    <p:notesMasterId r:id="rId43"/>
   </p:notesMasterIdLst>
   <p:sldIdLst>
     <p:sldId id="257" r:id="rId2"/>
@@ -48,6 +48,7 @@
     <p:sldId id="358" r:id="rId39"/>
     <p:sldId id="353" r:id="rId40"/>
     <p:sldId id="359" r:id="rId41"/>
+    <p:sldId id="361" r:id="rId42"/>
   </p:sldIdLst>
   <p:sldSz cx="12192000" cy="6858000"/>
   <p:notesSz cx="6858000" cy="9144000"/>
@@ -248,7 +249,7 @@
           <a:p>
             <a:fld id="{6A4B1ABF-BAF2-0E4B-88A8-8F2BBF0074AC}" type="datetimeFigureOut">
               <a:rPr lang="en-US" smtClean="0"/>
-              <a:t>10/6/25</a:t>
+              <a:t>10/7/25</a:t>
             </a:fld>
             <a:endParaRPr lang="en-US"/>
           </a:p>
@@ -3104,7 +3105,7 @@
           <a:p>
             <a:fld id="{BA763BF8-AC66-E249-9CE8-8353EEB16B82}" type="datetimeFigureOut">
               <a:rPr lang="en-US" smtClean="0"/>
-              <a:t>10/6/25</a:t>
+              <a:t>10/7/25</a:t>
             </a:fld>
             <a:endParaRPr lang="en-US"/>
           </a:p>
@@ -3306,7 +3307,7 @@
           <a:p>
             <a:fld id="{BA763BF8-AC66-E249-9CE8-8353EEB16B82}" type="datetimeFigureOut">
               <a:rPr lang="en-US" smtClean="0"/>
-              <a:t>10/6/25</a:t>
+              <a:t>10/7/25</a:t>
             </a:fld>
             <a:endParaRPr lang="en-US"/>
           </a:p>
@@ -3514,7 +3515,7 @@
           <a:p>
             <a:fld id="{BA763BF8-AC66-E249-9CE8-8353EEB16B82}" type="datetimeFigureOut">
               <a:rPr lang="en-US" smtClean="0"/>
-              <a:t>10/6/25</a:t>
+              <a:t>10/7/25</a:t>
             </a:fld>
             <a:endParaRPr lang="en-US"/>
           </a:p>
@@ -3929,7 +3930,7 @@
           <a:p>
             <a:fld id="{BA763BF8-AC66-E249-9CE8-8353EEB16B82}" type="datetimeFigureOut">
               <a:rPr lang="en-US" smtClean="0"/>
-              <a:t>10/6/25</a:t>
+              <a:t>10/7/25</a:t>
             </a:fld>
             <a:endParaRPr lang="en-US"/>
           </a:p>
@@ -4204,7 +4205,7 @@
           <a:p>
             <a:fld id="{BA763BF8-AC66-E249-9CE8-8353EEB16B82}" type="datetimeFigureOut">
               <a:rPr lang="en-US" smtClean="0"/>
-              <a:t>10/6/25</a:t>
+              <a:t>10/7/25</a:t>
             </a:fld>
             <a:endParaRPr lang="en-US"/>
           </a:p>
@@ -4473,7 +4474,7 @@
           <a:p>
             <a:fld id="{BA763BF8-AC66-E249-9CE8-8353EEB16B82}" type="datetimeFigureOut">
               <a:rPr lang="en-US" smtClean="0"/>
-              <a:t>10/6/25</a:t>
+              <a:t>10/7/25</a:t>
             </a:fld>
             <a:endParaRPr lang="en-US"/>
           </a:p>
@@ -4889,7 +4890,7 @@
           <a:p>
             <a:fld id="{BA763BF8-AC66-E249-9CE8-8353EEB16B82}" type="datetimeFigureOut">
               <a:rPr lang="en-US" smtClean="0"/>
-              <a:t>10/6/25</a:t>
+              <a:t>10/7/25</a:t>
             </a:fld>
             <a:endParaRPr lang="en-US"/>
           </a:p>
@@ -5034,7 +5035,7 @@
           <a:p>
             <a:fld id="{BA763BF8-AC66-E249-9CE8-8353EEB16B82}" type="datetimeFigureOut">
               <a:rPr lang="en-US" smtClean="0"/>
-              <a:t>10/6/25</a:t>
+              <a:t>10/7/25</a:t>
             </a:fld>
             <a:endParaRPr lang="en-US"/>
           </a:p>
@@ -5147,7 +5148,7 @@
           <a:p>
             <a:fld id="{BA763BF8-AC66-E249-9CE8-8353EEB16B82}" type="datetimeFigureOut">
               <a:rPr lang="en-US" smtClean="0"/>
-              <a:t>10/6/25</a:t>
+              <a:t>10/7/25</a:t>
             </a:fld>
             <a:endParaRPr lang="en-US"/>
           </a:p>
@@ -5458,7 +5459,7 @@
           <a:p>
             <a:fld id="{BA763BF8-AC66-E249-9CE8-8353EEB16B82}" type="datetimeFigureOut">
               <a:rPr lang="en-US" smtClean="0"/>
-              <a:t>10/6/25</a:t>
+              <a:t>10/7/25</a:t>
             </a:fld>
             <a:endParaRPr lang="en-US"/>
           </a:p>
@@ -5746,7 +5747,7 @@
           <a:p>
             <a:fld id="{BA763BF8-AC66-E249-9CE8-8353EEB16B82}" type="datetimeFigureOut">
               <a:rPr lang="en-US" smtClean="0"/>
-              <a:t>10/6/25</a:t>
+              <a:t>10/7/25</a:t>
             </a:fld>
             <a:endParaRPr lang="en-US"/>
           </a:p>
@@ -5990,7 +5991,7 @@
             <a:fld id="{BA763BF8-AC66-E249-9CE8-8353EEB16B82}" type="datetimeFigureOut">
               <a:rPr lang="en-US" smtClean="0"/>
               <a:pPr/>
-              <a:t>10/6/25</a:t>
+              <a:t>10/7/25</a:t>
             </a:fld>
             <a:endParaRPr lang="en-US"/>
           </a:p>
@@ -17685,18 +17686,12 @@
               <a:rPr lang="en-US" dirty="0">
                 <a:hlinkClick r:id="rId2"/>
               </a:rPr>
-              <a:t>https://youtu.be/AHfUBqzWIkw?list</a:t>
-            </a:r>
-            <a:r>
-              <a:rPr lang="en-US">
-                <a:hlinkClick r:id="rId2"/>
-              </a:rPr>
-              <a:t>=PLB2iAtgpI4YGoXjV-Ar_xuRIxvND9Q3WJ&amp;t=525</a:t>
-            </a:r>
-            <a:endParaRPr lang="en-US"/>
-          </a:p>
-          <a:p>
-            <a:endParaRPr lang="en-US"/>
+              <a:t>https://youtu.be/AHfUBqzWIkw?list=PLB2iAtgpI4YGoXjV-Ar_xuRIxvND9Q3WJ&amp;t=525</a:t>
+            </a:r>
+            <a:endParaRPr lang="en-US" dirty="0"/>
+          </a:p>
+          <a:p>
+            <a:endParaRPr lang="en-US" dirty="0"/>
           </a:p>
         </p:txBody>
       </p:sp>
@@ -17704,6 +17699,154 @@
     <p:extLst>
       <p:ext uri="{BB962C8B-B14F-4D97-AF65-F5344CB8AC3E}">
         <p14:creationId xmlns:p14="http://schemas.microsoft.com/office/powerpoint/2010/main" val="300872728"/>
+      </p:ext>
+    </p:extLst>
+  </p:cSld>
+  <p:clrMapOvr>
+    <a:masterClrMapping/>
+  </p:clrMapOvr>
+</p:sld>
+</file>
+
+<file path=ppt/slides/slide41.xml><?xml version="1.0" encoding="utf-8"?>
+<p:sld xmlns:a="http://schemas.openxmlformats.org/drawingml/2006/main" xmlns:r="http://schemas.openxmlformats.org/officeDocument/2006/relationships" xmlns:p="http://schemas.openxmlformats.org/presentationml/2006/main">
+  <p:cSld>
+    <p:spTree>
+      <p:nvGrpSpPr>
+        <p:cNvPr id="1" name=""/>
+        <p:cNvGrpSpPr/>
+        <p:nvPr/>
+      </p:nvGrpSpPr>
+      <p:grpSpPr>
+        <a:xfrm>
+          <a:off x="0" y="0"/>
+          <a:ext cx="0" cy="0"/>
+          <a:chOff x="0" y="0"/>
+          <a:chExt cx="0" cy="0"/>
+        </a:xfrm>
+      </p:grpSpPr>
+      <p:sp>
+        <p:nvSpPr>
+          <p:cNvPr id="2" name="Title 1">
+            <a:extLst>
+              <a:ext uri="{FF2B5EF4-FFF2-40B4-BE49-F238E27FC236}">
+                <a16:creationId xmlns:a16="http://schemas.microsoft.com/office/drawing/2014/main" id="{09E55B06-6292-353E-C679-F0E9FC6C052C}"/>
+              </a:ext>
+            </a:extLst>
+          </p:cNvPr>
+          <p:cNvSpPr>
+            <a:spLocks noGrp="1"/>
+          </p:cNvSpPr>
+          <p:nvPr>
+            <p:ph type="title"/>
+          </p:nvPr>
+        </p:nvSpPr>
+        <p:spPr/>
+        <p:txBody>
+          <a:bodyPr/>
+          <a:lstStyle/>
+          <a:p>
+            <a:r>
+              <a:rPr lang="en-US" dirty="0"/>
+              <a:t>NHST – Cohen (1994)</a:t>
+            </a:r>
+          </a:p>
+        </p:txBody>
+      </p:sp>
+      <p:pic>
+        <p:nvPicPr>
+          <p:cNvPr id="5" name="Picture 4" descr="A white paper with black text&#10;&#10;AI-generated content may be incorrect.">
+            <a:extLst>
+              <a:ext uri="{FF2B5EF4-FFF2-40B4-BE49-F238E27FC236}">
+                <a16:creationId xmlns:a16="http://schemas.microsoft.com/office/drawing/2014/main" id="{8F84CD77-02A5-9340-62FC-3827A311D0AE}"/>
+              </a:ext>
+            </a:extLst>
+          </p:cNvPr>
+          <p:cNvPicPr>
+            <a:picLocks noChangeAspect="1"/>
+          </p:cNvPicPr>
+          <p:nvPr/>
+        </p:nvPicPr>
+        <p:blipFill>
+          <a:blip r:embed="rId2"/>
+          <a:stretch>
+            <a:fillRect/>
+          </a:stretch>
+        </p:blipFill>
+        <p:spPr>
+          <a:xfrm>
+            <a:off x="6246283" y="4372802"/>
+            <a:ext cx="4927050" cy="1935095"/>
+          </a:xfrm>
+          <a:prstGeom prst="rect">
+            <a:avLst/>
+          </a:prstGeom>
+        </p:spPr>
+      </p:pic>
+      <p:pic>
+        <p:nvPicPr>
+          <p:cNvPr id="7" name="Picture 6" descr="A close up of a paper&#10;&#10;AI-generated content may be incorrect.">
+            <a:extLst>
+              <a:ext uri="{FF2B5EF4-FFF2-40B4-BE49-F238E27FC236}">
+                <a16:creationId xmlns:a16="http://schemas.microsoft.com/office/drawing/2014/main" id="{BF534F35-91E7-7C26-9E74-8CFED89BE346}"/>
+              </a:ext>
+            </a:extLst>
+          </p:cNvPr>
+          <p:cNvPicPr>
+            <a:picLocks noChangeAspect="1"/>
+          </p:cNvPicPr>
+          <p:nvPr/>
+        </p:nvPicPr>
+        <p:blipFill>
+          <a:blip r:embed="rId3"/>
+          <a:stretch>
+            <a:fillRect/>
+          </a:stretch>
+        </p:blipFill>
+        <p:spPr>
+          <a:xfrm>
+            <a:off x="6246283" y="1690687"/>
+            <a:ext cx="4941936" cy="2724019"/>
+          </a:xfrm>
+          <a:prstGeom prst="rect">
+            <a:avLst/>
+          </a:prstGeom>
+        </p:spPr>
+      </p:pic>
+      <p:pic>
+        <p:nvPicPr>
+          <p:cNvPr id="9" name="Picture 8" descr="A close-up of a paper&#10;&#10;AI-generated content may be incorrect.">
+            <a:extLst>
+              <a:ext uri="{FF2B5EF4-FFF2-40B4-BE49-F238E27FC236}">
+                <a16:creationId xmlns:a16="http://schemas.microsoft.com/office/drawing/2014/main" id="{507853CD-D568-59E0-DF4B-B51186533516}"/>
+              </a:ext>
+            </a:extLst>
+          </p:cNvPr>
+          <p:cNvPicPr>
+            <a:picLocks noChangeAspect="1"/>
+          </p:cNvPicPr>
+          <p:nvPr/>
+        </p:nvPicPr>
+        <p:blipFill>
+          <a:blip r:embed="rId4"/>
+          <a:stretch>
+            <a:fillRect/>
+          </a:stretch>
+        </p:blipFill>
+        <p:spPr>
+          <a:xfrm>
+            <a:off x="1049866" y="1690688"/>
+            <a:ext cx="5046133" cy="3661796"/>
+          </a:xfrm>
+          <a:prstGeom prst="rect">
+            <a:avLst/>
+          </a:prstGeom>
+        </p:spPr>
+      </p:pic>
+    </p:spTree>
+    <p:extLst>
+      <p:ext uri="{BB962C8B-B14F-4D97-AF65-F5344CB8AC3E}">
+        <p14:creationId xmlns:p14="http://schemas.microsoft.com/office/powerpoint/2010/main" val="4281298049"/>
       </p:ext>
     </p:extLst>
   </p:cSld>
